--- a/public/videos/repositories/kousokubus-benri/kousokubus-benri-tech-preview.pptx
+++ b/public/videos/repositories/kousokubus-benri/kousokubus-benri-tech-preview.pptx
@@ -134,7 +134,7 @@
           <p:cNvPr id="2" name="タイトル 1">
             <a:extLst>
               <a:ext uri="{FF2B5EF4-FFF2-40B4-BE49-F238E27FC236}">
-                <a16:creationId xmlns:a16="http://schemas.microsoft.com/office/drawing/2014/main" id="{E38CDCE6-E80D-0B3F-915D-8352D939A2C9}"/>
+                <a16:creationId xmlns:a16="http://schemas.microsoft.com/office/drawing/2014/main" id="{AEB49F79-519E-8330-B371-096B75FE7DA7}"/>
               </a:ext>
             </a:extLst>
           </p:cNvPr>
@@ -171,7 +171,7 @@
           <p:cNvPr id="3" name="字幕 2">
             <a:extLst>
               <a:ext uri="{FF2B5EF4-FFF2-40B4-BE49-F238E27FC236}">
-                <a16:creationId xmlns:a16="http://schemas.microsoft.com/office/drawing/2014/main" id="{C7EB805F-F7FF-7572-1876-0EB33832EA0B}"/>
+                <a16:creationId xmlns:a16="http://schemas.microsoft.com/office/drawing/2014/main" id="{D9CAF168-9F1C-81EE-B66E-EC2EF1CF46E8}"/>
               </a:ext>
             </a:extLst>
           </p:cNvPr>
@@ -241,7 +241,7 @@
           <p:cNvPr id="4" name="日付プレースホルダー 3">
             <a:extLst>
               <a:ext uri="{FF2B5EF4-FFF2-40B4-BE49-F238E27FC236}">
-                <a16:creationId xmlns:a16="http://schemas.microsoft.com/office/drawing/2014/main" id="{BD4ADDF6-3401-5B19-A43F-F2E9824B85B1}"/>
+                <a16:creationId xmlns:a16="http://schemas.microsoft.com/office/drawing/2014/main" id="{489BF889-24E3-436D-D0B8-CAA031D56667}"/>
               </a:ext>
             </a:extLst>
           </p:cNvPr>
@@ -257,7 +257,7 @@
           <a:bodyPr/>
           <a:lstStyle/>
           <a:p>
-            <a:fld id="{CDF1F171-55D7-4860-B64F-9E59B446BDA1}" type="datetimeFigureOut">
+            <a:fld id="{9962EF84-B6DF-449E-AFEB-FAC94E7545E8}" type="datetimeFigureOut">
               <a:rPr kumimoji="1" lang="ja-JP" altLang="en-US" smtClean="0"/>
               <a:t>2026/7/30</a:t>
             </a:fld>
@@ -270,7 +270,7 @@
           <p:cNvPr id="5" name="フッター プレースホルダー 4">
             <a:extLst>
               <a:ext uri="{FF2B5EF4-FFF2-40B4-BE49-F238E27FC236}">
-                <a16:creationId xmlns:a16="http://schemas.microsoft.com/office/drawing/2014/main" id="{EC094982-B6BD-F067-6F43-37E0CC7592C0}"/>
+                <a16:creationId xmlns:a16="http://schemas.microsoft.com/office/drawing/2014/main" id="{60DD10FE-8779-2150-0E20-063ED2842640}"/>
               </a:ext>
             </a:extLst>
           </p:cNvPr>
@@ -295,7 +295,7 @@
           <p:cNvPr id="6" name="スライド番号プレースホルダー 5">
             <a:extLst>
               <a:ext uri="{FF2B5EF4-FFF2-40B4-BE49-F238E27FC236}">
-                <a16:creationId xmlns:a16="http://schemas.microsoft.com/office/drawing/2014/main" id="{EEBEF659-B93B-1E73-BEAE-B2489EDEDEAE}"/>
+                <a16:creationId xmlns:a16="http://schemas.microsoft.com/office/drawing/2014/main" id="{600A2B5F-61D3-5ED5-1137-DA799C2598E5}"/>
               </a:ext>
             </a:extLst>
           </p:cNvPr>
@@ -311,7 +311,7 @@
           <a:bodyPr/>
           <a:lstStyle/>
           <a:p>
-            <a:fld id="{57DB16C9-B3C2-4640-88FF-2EC2C0AE79B8}" type="slidenum">
+            <a:fld id="{4D2E4571-73FA-49EC-BDBA-3E4220AFBD3D}" type="slidenum">
               <a:rPr kumimoji="1" lang="ja-JP" altLang="en-US" smtClean="0"/>
               <a:t>‹#›</a:t>
             </a:fld>
@@ -322,7 +322,7 @@
     </p:spTree>
     <p:extLst>
       <p:ext uri="{BB962C8B-B14F-4D97-AF65-F5344CB8AC3E}">
-        <p14:creationId xmlns:p14="http://schemas.microsoft.com/office/powerpoint/2010/main" val="1979244431"/>
+        <p14:creationId xmlns:p14="http://schemas.microsoft.com/office/powerpoint/2010/main" val="866417731"/>
       </p:ext>
     </p:extLst>
   </p:cSld>
@@ -354,7 +354,7 @@
           <p:cNvPr id="2" name="タイトル 1">
             <a:extLst>
               <a:ext uri="{FF2B5EF4-FFF2-40B4-BE49-F238E27FC236}">
-                <a16:creationId xmlns:a16="http://schemas.microsoft.com/office/drawing/2014/main" id="{EF65F694-73A1-0367-B4B6-BC31CF8B3D89}"/>
+                <a16:creationId xmlns:a16="http://schemas.microsoft.com/office/drawing/2014/main" id="{5E80C898-C219-4416-40AA-128CB182B611}"/>
               </a:ext>
             </a:extLst>
           </p:cNvPr>
@@ -382,7 +382,7 @@
           <p:cNvPr id="3" name="縦書きテキスト プレースホルダー 2">
             <a:extLst>
               <a:ext uri="{FF2B5EF4-FFF2-40B4-BE49-F238E27FC236}">
-                <a16:creationId xmlns:a16="http://schemas.microsoft.com/office/drawing/2014/main" id="{81AEF846-6797-E6BB-0DE3-95A5AF9C34B2}"/>
+                <a16:creationId xmlns:a16="http://schemas.microsoft.com/office/drawing/2014/main" id="{1C82D03D-6D1B-718D-7830-4F221F4ACAF7}"/>
               </a:ext>
             </a:extLst>
           </p:cNvPr>
@@ -471,7 +471,7 @@
           <p:cNvPr id="4" name="日付プレースホルダー 3">
             <a:extLst>
               <a:ext uri="{FF2B5EF4-FFF2-40B4-BE49-F238E27FC236}">
-                <a16:creationId xmlns:a16="http://schemas.microsoft.com/office/drawing/2014/main" id="{8FCEC645-2BDB-2DE3-76FC-D98C591783CC}"/>
+                <a16:creationId xmlns:a16="http://schemas.microsoft.com/office/drawing/2014/main" id="{5BF21AEA-29F0-60D0-B908-AC59F40E81DC}"/>
               </a:ext>
             </a:extLst>
           </p:cNvPr>
@@ -487,7 +487,7 @@
           <a:bodyPr/>
           <a:lstStyle/>
           <a:p>
-            <a:fld id="{CDF1F171-55D7-4860-B64F-9E59B446BDA1}" type="datetimeFigureOut">
+            <a:fld id="{9962EF84-B6DF-449E-AFEB-FAC94E7545E8}" type="datetimeFigureOut">
               <a:rPr kumimoji="1" lang="ja-JP" altLang="en-US" smtClean="0"/>
               <a:t>2026/7/30</a:t>
             </a:fld>
@@ -500,7 +500,7 @@
           <p:cNvPr id="5" name="フッター プレースホルダー 4">
             <a:extLst>
               <a:ext uri="{FF2B5EF4-FFF2-40B4-BE49-F238E27FC236}">
-                <a16:creationId xmlns:a16="http://schemas.microsoft.com/office/drawing/2014/main" id="{50915BD4-B23D-14B9-72E1-2985FE22D8FE}"/>
+                <a16:creationId xmlns:a16="http://schemas.microsoft.com/office/drawing/2014/main" id="{7DCC5386-F968-150C-ECF2-6BA21CDA1940}"/>
               </a:ext>
             </a:extLst>
           </p:cNvPr>
@@ -525,7 +525,7 @@
           <p:cNvPr id="6" name="スライド番号プレースホルダー 5">
             <a:extLst>
               <a:ext uri="{FF2B5EF4-FFF2-40B4-BE49-F238E27FC236}">
-                <a16:creationId xmlns:a16="http://schemas.microsoft.com/office/drawing/2014/main" id="{A18E87D8-FD38-B18B-B7F7-1F9591C1CF3C}"/>
+                <a16:creationId xmlns:a16="http://schemas.microsoft.com/office/drawing/2014/main" id="{CB49F6E0-801B-B5AF-3A4F-787805C16E6E}"/>
               </a:ext>
             </a:extLst>
           </p:cNvPr>
@@ -541,7 +541,7 @@
           <a:bodyPr/>
           <a:lstStyle/>
           <a:p>
-            <a:fld id="{57DB16C9-B3C2-4640-88FF-2EC2C0AE79B8}" type="slidenum">
+            <a:fld id="{4D2E4571-73FA-49EC-BDBA-3E4220AFBD3D}" type="slidenum">
               <a:rPr kumimoji="1" lang="ja-JP" altLang="en-US" smtClean="0"/>
               <a:t>‹#›</a:t>
             </a:fld>
@@ -552,7 +552,7 @@
     </p:spTree>
     <p:extLst>
       <p:ext uri="{BB962C8B-B14F-4D97-AF65-F5344CB8AC3E}">
-        <p14:creationId xmlns:p14="http://schemas.microsoft.com/office/powerpoint/2010/main" val="1819469014"/>
+        <p14:creationId xmlns:p14="http://schemas.microsoft.com/office/powerpoint/2010/main" val="594587301"/>
       </p:ext>
     </p:extLst>
   </p:cSld>
@@ -584,7 +584,7 @@
           <p:cNvPr id="2" name="縦書きタイトル 1">
             <a:extLst>
               <a:ext uri="{FF2B5EF4-FFF2-40B4-BE49-F238E27FC236}">
-                <a16:creationId xmlns:a16="http://schemas.microsoft.com/office/drawing/2014/main" id="{3FBABB9E-7A07-C6DE-CC03-CF6FA4087017}"/>
+                <a16:creationId xmlns:a16="http://schemas.microsoft.com/office/drawing/2014/main" id="{632EBD9A-32AC-9625-FDCD-98C9F2B0E92E}"/>
               </a:ext>
             </a:extLst>
           </p:cNvPr>
@@ -617,7 +617,7 @@
           <p:cNvPr id="3" name="縦書きテキスト プレースホルダー 2">
             <a:extLst>
               <a:ext uri="{FF2B5EF4-FFF2-40B4-BE49-F238E27FC236}">
-                <a16:creationId xmlns:a16="http://schemas.microsoft.com/office/drawing/2014/main" id="{819F6D19-A02A-393F-8759-94A71AD94625}"/>
+                <a16:creationId xmlns:a16="http://schemas.microsoft.com/office/drawing/2014/main" id="{ED68BA14-3432-CCB6-C354-DA68B74D48C8}"/>
               </a:ext>
             </a:extLst>
           </p:cNvPr>
@@ -711,7 +711,7 @@
           <p:cNvPr id="4" name="日付プレースホルダー 3">
             <a:extLst>
               <a:ext uri="{FF2B5EF4-FFF2-40B4-BE49-F238E27FC236}">
-                <a16:creationId xmlns:a16="http://schemas.microsoft.com/office/drawing/2014/main" id="{8F67BDFD-62A0-A066-25CA-E87628E4883F}"/>
+                <a16:creationId xmlns:a16="http://schemas.microsoft.com/office/drawing/2014/main" id="{D95F70D4-6199-ABA2-5229-C1A2FD868C35}"/>
               </a:ext>
             </a:extLst>
           </p:cNvPr>
@@ -727,7 +727,7 @@
           <a:bodyPr/>
           <a:lstStyle/>
           <a:p>
-            <a:fld id="{CDF1F171-55D7-4860-B64F-9E59B446BDA1}" type="datetimeFigureOut">
+            <a:fld id="{9962EF84-B6DF-449E-AFEB-FAC94E7545E8}" type="datetimeFigureOut">
               <a:rPr kumimoji="1" lang="ja-JP" altLang="en-US" smtClean="0"/>
               <a:t>2026/7/30</a:t>
             </a:fld>
@@ -740,7 +740,7 @@
           <p:cNvPr id="5" name="フッター プレースホルダー 4">
             <a:extLst>
               <a:ext uri="{FF2B5EF4-FFF2-40B4-BE49-F238E27FC236}">
-                <a16:creationId xmlns:a16="http://schemas.microsoft.com/office/drawing/2014/main" id="{5DBCECD0-37BA-9EEB-ED89-BB09B8DB65C0}"/>
+                <a16:creationId xmlns:a16="http://schemas.microsoft.com/office/drawing/2014/main" id="{1DE7E7FC-DBCF-E8C3-2482-627140DE3E98}"/>
               </a:ext>
             </a:extLst>
           </p:cNvPr>
@@ -765,7 +765,7 @@
           <p:cNvPr id="6" name="スライド番号プレースホルダー 5">
             <a:extLst>
               <a:ext uri="{FF2B5EF4-FFF2-40B4-BE49-F238E27FC236}">
-                <a16:creationId xmlns:a16="http://schemas.microsoft.com/office/drawing/2014/main" id="{AB7CAEC9-67A9-8D1E-E76B-E3AD25560DA0}"/>
+                <a16:creationId xmlns:a16="http://schemas.microsoft.com/office/drawing/2014/main" id="{755E0479-4BC5-580C-2319-9357755D09E5}"/>
               </a:ext>
             </a:extLst>
           </p:cNvPr>
@@ -781,7 +781,7 @@
           <a:bodyPr/>
           <a:lstStyle/>
           <a:p>
-            <a:fld id="{57DB16C9-B3C2-4640-88FF-2EC2C0AE79B8}" type="slidenum">
+            <a:fld id="{4D2E4571-73FA-49EC-BDBA-3E4220AFBD3D}" type="slidenum">
               <a:rPr kumimoji="1" lang="ja-JP" altLang="en-US" smtClean="0"/>
               <a:t>‹#›</a:t>
             </a:fld>
@@ -792,7 +792,7 @@
     </p:spTree>
     <p:extLst>
       <p:ext uri="{BB962C8B-B14F-4D97-AF65-F5344CB8AC3E}">
-        <p14:creationId xmlns:p14="http://schemas.microsoft.com/office/powerpoint/2010/main" val="1580986208"/>
+        <p14:creationId xmlns:p14="http://schemas.microsoft.com/office/powerpoint/2010/main" val="527989483"/>
       </p:ext>
     </p:extLst>
   </p:cSld>
@@ -824,7 +824,7 @@
           <p:cNvPr id="2" name="タイトル 1">
             <a:extLst>
               <a:ext uri="{FF2B5EF4-FFF2-40B4-BE49-F238E27FC236}">
-                <a16:creationId xmlns:a16="http://schemas.microsoft.com/office/drawing/2014/main" id="{8FDF10B6-9B0C-3436-4B8F-A89E04CB045F}"/>
+                <a16:creationId xmlns:a16="http://schemas.microsoft.com/office/drawing/2014/main" id="{09A1154A-78EC-FA40-D79D-3540AB8E6C88}"/>
               </a:ext>
             </a:extLst>
           </p:cNvPr>
@@ -852,7 +852,7 @@
           <p:cNvPr id="3" name="コンテンツ プレースホルダー 2">
             <a:extLst>
               <a:ext uri="{FF2B5EF4-FFF2-40B4-BE49-F238E27FC236}">
-                <a16:creationId xmlns:a16="http://schemas.microsoft.com/office/drawing/2014/main" id="{7FD66E3A-2574-6A3A-ACC5-89C9D506CDDC}"/>
+                <a16:creationId xmlns:a16="http://schemas.microsoft.com/office/drawing/2014/main" id="{A85899AF-42AD-0C0E-5E7A-EF4DEC2B4C92}"/>
               </a:ext>
             </a:extLst>
           </p:cNvPr>
@@ -941,7 +941,7 @@
           <p:cNvPr id="4" name="日付プレースホルダー 3">
             <a:extLst>
               <a:ext uri="{FF2B5EF4-FFF2-40B4-BE49-F238E27FC236}">
-                <a16:creationId xmlns:a16="http://schemas.microsoft.com/office/drawing/2014/main" id="{BE1D421B-8EBD-D7AD-12EA-CD215AD0774A}"/>
+                <a16:creationId xmlns:a16="http://schemas.microsoft.com/office/drawing/2014/main" id="{371ECDA9-F4D0-F8CB-7B0B-0858F392A9E2}"/>
               </a:ext>
             </a:extLst>
           </p:cNvPr>
@@ -957,7 +957,7 @@
           <a:bodyPr/>
           <a:lstStyle/>
           <a:p>
-            <a:fld id="{CDF1F171-55D7-4860-B64F-9E59B446BDA1}" type="datetimeFigureOut">
+            <a:fld id="{9962EF84-B6DF-449E-AFEB-FAC94E7545E8}" type="datetimeFigureOut">
               <a:rPr kumimoji="1" lang="ja-JP" altLang="en-US" smtClean="0"/>
               <a:t>2026/7/30</a:t>
             </a:fld>
@@ -970,7 +970,7 @@
           <p:cNvPr id="5" name="フッター プレースホルダー 4">
             <a:extLst>
               <a:ext uri="{FF2B5EF4-FFF2-40B4-BE49-F238E27FC236}">
-                <a16:creationId xmlns:a16="http://schemas.microsoft.com/office/drawing/2014/main" id="{FECA4BAF-62F3-FDFC-6A3F-E83CDFE17421}"/>
+                <a16:creationId xmlns:a16="http://schemas.microsoft.com/office/drawing/2014/main" id="{7E5E1D5B-D5F2-01BE-266B-92A7BADE6130}"/>
               </a:ext>
             </a:extLst>
           </p:cNvPr>
@@ -995,7 +995,7 @@
           <p:cNvPr id="6" name="スライド番号プレースホルダー 5">
             <a:extLst>
               <a:ext uri="{FF2B5EF4-FFF2-40B4-BE49-F238E27FC236}">
-                <a16:creationId xmlns:a16="http://schemas.microsoft.com/office/drawing/2014/main" id="{621A0CAD-C135-E011-1E63-EA09D46F4B23}"/>
+                <a16:creationId xmlns:a16="http://schemas.microsoft.com/office/drawing/2014/main" id="{4D121DB9-5ACC-B5DF-E31D-F65BCA9263A3}"/>
               </a:ext>
             </a:extLst>
           </p:cNvPr>
@@ -1011,7 +1011,7 @@
           <a:bodyPr/>
           <a:lstStyle/>
           <a:p>
-            <a:fld id="{57DB16C9-B3C2-4640-88FF-2EC2C0AE79B8}" type="slidenum">
+            <a:fld id="{4D2E4571-73FA-49EC-BDBA-3E4220AFBD3D}" type="slidenum">
               <a:rPr kumimoji="1" lang="ja-JP" altLang="en-US" smtClean="0"/>
               <a:t>‹#›</a:t>
             </a:fld>
@@ -1022,7 +1022,7 @@
     </p:spTree>
     <p:extLst>
       <p:ext uri="{BB962C8B-B14F-4D97-AF65-F5344CB8AC3E}">
-        <p14:creationId xmlns:p14="http://schemas.microsoft.com/office/powerpoint/2010/main" val="1585267209"/>
+        <p14:creationId xmlns:p14="http://schemas.microsoft.com/office/powerpoint/2010/main" val="1761743698"/>
       </p:ext>
     </p:extLst>
   </p:cSld>
@@ -1054,7 +1054,7 @@
           <p:cNvPr id="2" name="タイトル 1">
             <a:extLst>
               <a:ext uri="{FF2B5EF4-FFF2-40B4-BE49-F238E27FC236}">
-                <a16:creationId xmlns:a16="http://schemas.microsoft.com/office/drawing/2014/main" id="{C8462DFE-F655-C683-5B9B-FC728A116140}"/>
+                <a16:creationId xmlns:a16="http://schemas.microsoft.com/office/drawing/2014/main" id="{C68E9221-00D6-21F5-24E3-8FDD47738C5F}"/>
               </a:ext>
             </a:extLst>
           </p:cNvPr>
@@ -1091,7 +1091,7 @@
           <p:cNvPr id="3" name="テキスト プレースホルダー 2">
             <a:extLst>
               <a:ext uri="{FF2B5EF4-FFF2-40B4-BE49-F238E27FC236}">
-                <a16:creationId xmlns:a16="http://schemas.microsoft.com/office/drawing/2014/main" id="{2A34FC11-DFD9-739D-E2AA-2B5B404B287A}"/>
+                <a16:creationId xmlns:a16="http://schemas.microsoft.com/office/drawing/2014/main" id="{1059CB16-212D-C1C3-4D65-C069EA408246}"/>
               </a:ext>
             </a:extLst>
           </p:cNvPr>
@@ -1216,7 +1216,7 @@
           <p:cNvPr id="4" name="日付プレースホルダー 3">
             <a:extLst>
               <a:ext uri="{FF2B5EF4-FFF2-40B4-BE49-F238E27FC236}">
-                <a16:creationId xmlns:a16="http://schemas.microsoft.com/office/drawing/2014/main" id="{6C7C161E-CAFD-2741-7098-1A421625B8B1}"/>
+                <a16:creationId xmlns:a16="http://schemas.microsoft.com/office/drawing/2014/main" id="{517D9B5D-3398-F427-B328-45DFCFE0CAC9}"/>
               </a:ext>
             </a:extLst>
           </p:cNvPr>
@@ -1232,7 +1232,7 @@
           <a:bodyPr/>
           <a:lstStyle/>
           <a:p>
-            <a:fld id="{CDF1F171-55D7-4860-B64F-9E59B446BDA1}" type="datetimeFigureOut">
+            <a:fld id="{9962EF84-B6DF-449E-AFEB-FAC94E7545E8}" type="datetimeFigureOut">
               <a:rPr kumimoji="1" lang="ja-JP" altLang="en-US" smtClean="0"/>
               <a:t>2026/7/30</a:t>
             </a:fld>
@@ -1245,7 +1245,7 @@
           <p:cNvPr id="5" name="フッター プレースホルダー 4">
             <a:extLst>
               <a:ext uri="{FF2B5EF4-FFF2-40B4-BE49-F238E27FC236}">
-                <a16:creationId xmlns:a16="http://schemas.microsoft.com/office/drawing/2014/main" id="{DBD12C4C-EB4D-C938-628A-A2835E554477}"/>
+                <a16:creationId xmlns:a16="http://schemas.microsoft.com/office/drawing/2014/main" id="{33288F30-4E9C-08B5-8F59-FCF015B76767}"/>
               </a:ext>
             </a:extLst>
           </p:cNvPr>
@@ -1270,7 +1270,7 @@
           <p:cNvPr id="6" name="スライド番号プレースホルダー 5">
             <a:extLst>
               <a:ext uri="{FF2B5EF4-FFF2-40B4-BE49-F238E27FC236}">
-                <a16:creationId xmlns:a16="http://schemas.microsoft.com/office/drawing/2014/main" id="{7EDADA2B-4E2C-F917-E7EA-21B5677B6CD2}"/>
+                <a16:creationId xmlns:a16="http://schemas.microsoft.com/office/drawing/2014/main" id="{7AAFB7DD-679B-0731-A16B-520E538E4C4E}"/>
               </a:ext>
             </a:extLst>
           </p:cNvPr>
@@ -1286,7 +1286,7 @@
           <a:bodyPr/>
           <a:lstStyle/>
           <a:p>
-            <a:fld id="{57DB16C9-B3C2-4640-88FF-2EC2C0AE79B8}" type="slidenum">
+            <a:fld id="{4D2E4571-73FA-49EC-BDBA-3E4220AFBD3D}" type="slidenum">
               <a:rPr kumimoji="1" lang="ja-JP" altLang="en-US" smtClean="0"/>
               <a:t>‹#›</a:t>
             </a:fld>
@@ -1297,7 +1297,7 @@
     </p:spTree>
     <p:extLst>
       <p:ext uri="{BB962C8B-B14F-4D97-AF65-F5344CB8AC3E}">
-        <p14:creationId xmlns:p14="http://schemas.microsoft.com/office/powerpoint/2010/main" val="1443821948"/>
+        <p14:creationId xmlns:p14="http://schemas.microsoft.com/office/powerpoint/2010/main" val="2723710474"/>
       </p:ext>
     </p:extLst>
   </p:cSld>
@@ -1329,7 +1329,7 @@
           <p:cNvPr id="2" name="タイトル 1">
             <a:extLst>
               <a:ext uri="{FF2B5EF4-FFF2-40B4-BE49-F238E27FC236}">
-                <a16:creationId xmlns:a16="http://schemas.microsoft.com/office/drawing/2014/main" id="{00366A31-C04C-AB57-C4B4-81B3E998EE49}"/>
+                <a16:creationId xmlns:a16="http://schemas.microsoft.com/office/drawing/2014/main" id="{B4A5078E-15B1-A137-8BED-49E67512C18B}"/>
               </a:ext>
             </a:extLst>
           </p:cNvPr>
@@ -1357,7 +1357,7 @@
           <p:cNvPr id="3" name="コンテンツ プレースホルダー 2">
             <a:extLst>
               <a:ext uri="{FF2B5EF4-FFF2-40B4-BE49-F238E27FC236}">
-                <a16:creationId xmlns:a16="http://schemas.microsoft.com/office/drawing/2014/main" id="{1AE70E7B-A4F6-979F-6C99-F832760BD27E}"/>
+                <a16:creationId xmlns:a16="http://schemas.microsoft.com/office/drawing/2014/main" id="{05A2983D-8E94-EF23-8266-BF50548B8A49}"/>
               </a:ext>
             </a:extLst>
           </p:cNvPr>
@@ -1451,7 +1451,7 @@
           <p:cNvPr id="4" name="コンテンツ プレースホルダー 3">
             <a:extLst>
               <a:ext uri="{FF2B5EF4-FFF2-40B4-BE49-F238E27FC236}">
-                <a16:creationId xmlns:a16="http://schemas.microsoft.com/office/drawing/2014/main" id="{4C5C7B27-5D10-2A5D-1E4C-3891C279AF34}"/>
+                <a16:creationId xmlns:a16="http://schemas.microsoft.com/office/drawing/2014/main" id="{DF388EA8-1DA4-0200-0E73-02824026B621}"/>
               </a:ext>
             </a:extLst>
           </p:cNvPr>
@@ -1545,7 +1545,7 @@
           <p:cNvPr id="5" name="日付プレースホルダー 4">
             <a:extLst>
               <a:ext uri="{FF2B5EF4-FFF2-40B4-BE49-F238E27FC236}">
-                <a16:creationId xmlns:a16="http://schemas.microsoft.com/office/drawing/2014/main" id="{C403C9E0-FEB2-1849-9C95-24D7C52942B2}"/>
+                <a16:creationId xmlns:a16="http://schemas.microsoft.com/office/drawing/2014/main" id="{CA26C868-4BEE-5076-7809-54A9E288B8A1}"/>
               </a:ext>
             </a:extLst>
           </p:cNvPr>
@@ -1561,7 +1561,7 @@
           <a:bodyPr/>
           <a:lstStyle/>
           <a:p>
-            <a:fld id="{CDF1F171-55D7-4860-B64F-9E59B446BDA1}" type="datetimeFigureOut">
+            <a:fld id="{9962EF84-B6DF-449E-AFEB-FAC94E7545E8}" type="datetimeFigureOut">
               <a:rPr kumimoji="1" lang="ja-JP" altLang="en-US" smtClean="0"/>
               <a:t>2026/7/30</a:t>
             </a:fld>
@@ -1574,7 +1574,7 @@
           <p:cNvPr id="6" name="フッター プレースホルダー 5">
             <a:extLst>
               <a:ext uri="{FF2B5EF4-FFF2-40B4-BE49-F238E27FC236}">
-                <a16:creationId xmlns:a16="http://schemas.microsoft.com/office/drawing/2014/main" id="{2E3183B8-B8FE-8285-5AB3-97D91D290EB2}"/>
+                <a16:creationId xmlns:a16="http://schemas.microsoft.com/office/drawing/2014/main" id="{52A09BB2-44E8-879D-EE64-CF176C3AFD3D}"/>
               </a:ext>
             </a:extLst>
           </p:cNvPr>
@@ -1599,7 +1599,7 @@
           <p:cNvPr id="7" name="スライド番号プレースホルダー 6">
             <a:extLst>
               <a:ext uri="{FF2B5EF4-FFF2-40B4-BE49-F238E27FC236}">
-                <a16:creationId xmlns:a16="http://schemas.microsoft.com/office/drawing/2014/main" id="{FC17693E-0EDA-5464-7FA7-D9F0671F814B}"/>
+                <a16:creationId xmlns:a16="http://schemas.microsoft.com/office/drawing/2014/main" id="{D61A7C26-83FC-C164-941C-09E1596B950F}"/>
               </a:ext>
             </a:extLst>
           </p:cNvPr>
@@ -1615,7 +1615,7 @@
           <a:bodyPr/>
           <a:lstStyle/>
           <a:p>
-            <a:fld id="{57DB16C9-B3C2-4640-88FF-2EC2C0AE79B8}" type="slidenum">
+            <a:fld id="{4D2E4571-73FA-49EC-BDBA-3E4220AFBD3D}" type="slidenum">
               <a:rPr kumimoji="1" lang="ja-JP" altLang="en-US" smtClean="0"/>
               <a:t>‹#›</a:t>
             </a:fld>
@@ -1626,7 +1626,7 @@
     </p:spTree>
     <p:extLst>
       <p:ext uri="{BB962C8B-B14F-4D97-AF65-F5344CB8AC3E}">
-        <p14:creationId xmlns:p14="http://schemas.microsoft.com/office/powerpoint/2010/main" val="2692303615"/>
+        <p14:creationId xmlns:p14="http://schemas.microsoft.com/office/powerpoint/2010/main" val="2090292767"/>
       </p:ext>
     </p:extLst>
   </p:cSld>
@@ -1658,7 +1658,7 @@
           <p:cNvPr id="2" name="タイトル 1">
             <a:extLst>
               <a:ext uri="{FF2B5EF4-FFF2-40B4-BE49-F238E27FC236}">
-                <a16:creationId xmlns:a16="http://schemas.microsoft.com/office/drawing/2014/main" id="{770FACF9-4FDB-0ABE-E0EA-F524E171623C}"/>
+                <a16:creationId xmlns:a16="http://schemas.microsoft.com/office/drawing/2014/main" id="{A6875C45-A2AA-0A93-6990-F23727950E17}"/>
               </a:ext>
             </a:extLst>
           </p:cNvPr>
@@ -1691,7 +1691,7 @@
           <p:cNvPr id="3" name="テキスト プレースホルダー 2">
             <a:extLst>
               <a:ext uri="{FF2B5EF4-FFF2-40B4-BE49-F238E27FC236}">
-                <a16:creationId xmlns:a16="http://schemas.microsoft.com/office/drawing/2014/main" id="{F22AF378-E5FD-919D-734C-E0F788486CF3}"/>
+                <a16:creationId xmlns:a16="http://schemas.microsoft.com/office/drawing/2014/main" id="{CFE87F51-4EB5-6073-DE3C-FD1D6A904787}"/>
               </a:ext>
             </a:extLst>
           </p:cNvPr>
@@ -1762,7 +1762,7 @@
           <p:cNvPr id="4" name="コンテンツ プレースホルダー 3">
             <a:extLst>
               <a:ext uri="{FF2B5EF4-FFF2-40B4-BE49-F238E27FC236}">
-                <a16:creationId xmlns:a16="http://schemas.microsoft.com/office/drawing/2014/main" id="{589343B8-FF0F-21BA-CEC9-5BE38B6237EB}"/>
+                <a16:creationId xmlns:a16="http://schemas.microsoft.com/office/drawing/2014/main" id="{043411DB-99A8-2278-6A59-69242B685D6C}"/>
               </a:ext>
             </a:extLst>
           </p:cNvPr>
@@ -1856,7 +1856,7 @@
           <p:cNvPr id="5" name="テキスト プレースホルダー 4">
             <a:extLst>
               <a:ext uri="{FF2B5EF4-FFF2-40B4-BE49-F238E27FC236}">
-                <a16:creationId xmlns:a16="http://schemas.microsoft.com/office/drawing/2014/main" id="{96928627-D33A-E381-BC68-0EE71325EB7E}"/>
+                <a16:creationId xmlns:a16="http://schemas.microsoft.com/office/drawing/2014/main" id="{CB023ED6-3884-9547-0229-8F6BC57EFDE0}"/>
               </a:ext>
             </a:extLst>
           </p:cNvPr>
@@ -1927,7 +1927,7 @@
           <p:cNvPr id="6" name="コンテンツ プレースホルダー 5">
             <a:extLst>
               <a:ext uri="{FF2B5EF4-FFF2-40B4-BE49-F238E27FC236}">
-                <a16:creationId xmlns:a16="http://schemas.microsoft.com/office/drawing/2014/main" id="{C8CF59EE-C73E-6643-352B-E2CFED32F955}"/>
+                <a16:creationId xmlns:a16="http://schemas.microsoft.com/office/drawing/2014/main" id="{0737B6DC-B723-9146-0907-0780844AD2D1}"/>
               </a:ext>
             </a:extLst>
           </p:cNvPr>
@@ -2021,7 +2021,7 @@
           <p:cNvPr id="7" name="日付プレースホルダー 6">
             <a:extLst>
               <a:ext uri="{FF2B5EF4-FFF2-40B4-BE49-F238E27FC236}">
-                <a16:creationId xmlns:a16="http://schemas.microsoft.com/office/drawing/2014/main" id="{4806C78A-5705-A301-54D0-1F417CFAD3E0}"/>
+                <a16:creationId xmlns:a16="http://schemas.microsoft.com/office/drawing/2014/main" id="{CD13CF62-48DB-A0CA-6938-EC54B8BF51C2}"/>
               </a:ext>
             </a:extLst>
           </p:cNvPr>
@@ -2037,7 +2037,7 @@
           <a:bodyPr/>
           <a:lstStyle/>
           <a:p>
-            <a:fld id="{CDF1F171-55D7-4860-B64F-9E59B446BDA1}" type="datetimeFigureOut">
+            <a:fld id="{9962EF84-B6DF-449E-AFEB-FAC94E7545E8}" type="datetimeFigureOut">
               <a:rPr kumimoji="1" lang="ja-JP" altLang="en-US" smtClean="0"/>
               <a:t>2026/7/30</a:t>
             </a:fld>
@@ -2050,7 +2050,7 @@
           <p:cNvPr id="8" name="フッター プレースホルダー 7">
             <a:extLst>
               <a:ext uri="{FF2B5EF4-FFF2-40B4-BE49-F238E27FC236}">
-                <a16:creationId xmlns:a16="http://schemas.microsoft.com/office/drawing/2014/main" id="{F9DB1BD7-3B52-6D2E-5533-B72A374F729A}"/>
+                <a16:creationId xmlns:a16="http://schemas.microsoft.com/office/drawing/2014/main" id="{9CBBCFA5-9B78-3768-C41D-E9AC7CA5A9F2}"/>
               </a:ext>
             </a:extLst>
           </p:cNvPr>
@@ -2075,7 +2075,7 @@
           <p:cNvPr id="9" name="スライド番号プレースホルダー 8">
             <a:extLst>
               <a:ext uri="{FF2B5EF4-FFF2-40B4-BE49-F238E27FC236}">
-                <a16:creationId xmlns:a16="http://schemas.microsoft.com/office/drawing/2014/main" id="{10807686-1733-B5D0-BDB9-71710D2025EE}"/>
+                <a16:creationId xmlns:a16="http://schemas.microsoft.com/office/drawing/2014/main" id="{DB233D64-4B75-A65A-57DE-73F1A1D09378}"/>
               </a:ext>
             </a:extLst>
           </p:cNvPr>
@@ -2091,7 +2091,7 @@
           <a:bodyPr/>
           <a:lstStyle/>
           <a:p>
-            <a:fld id="{57DB16C9-B3C2-4640-88FF-2EC2C0AE79B8}" type="slidenum">
+            <a:fld id="{4D2E4571-73FA-49EC-BDBA-3E4220AFBD3D}" type="slidenum">
               <a:rPr kumimoji="1" lang="ja-JP" altLang="en-US" smtClean="0"/>
               <a:t>‹#›</a:t>
             </a:fld>
@@ -2102,7 +2102,7 @@
     </p:spTree>
     <p:extLst>
       <p:ext uri="{BB962C8B-B14F-4D97-AF65-F5344CB8AC3E}">
-        <p14:creationId xmlns:p14="http://schemas.microsoft.com/office/powerpoint/2010/main" val="3777940028"/>
+        <p14:creationId xmlns:p14="http://schemas.microsoft.com/office/powerpoint/2010/main" val="2947040854"/>
       </p:ext>
     </p:extLst>
   </p:cSld>
@@ -2134,7 +2134,7 @@
           <p:cNvPr id="2" name="タイトル 1">
             <a:extLst>
               <a:ext uri="{FF2B5EF4-FFF2-40B4-BE49-F238E27FC236}">
-                <a16:creationId xmlns:a16="http://schemas.microsoft.com/office/drawing/2014/main" id="{BA5DB744-245E-497B-7C39-3A0D286FF8E5}"/>
+                <a16:creationId xmlns:a16="http://schemas.microsoft.com/office/drawing/2014/main" id="{E688A546-C563-637D-5619-1DB4048BE965}"/>
               </a:ext>
             </a:extLst>
           </p:cNvPr>
@@ -2162,7 +2162,7 @@
           <p:cNvPr id="3" name="日付プレースホルダー 2">
             <a:extLst>
               <a:ext uri="{FF2B5EF4-FFF2-40B4-BE49-F238E27FC236}">
-                <a16:creationId xmlns:a16="http://schemas.microsoft.com/office/drawing/2014/main" id="{0A997DFB-5B96-D477-E053-916F5ACB8021}"/>
+                <a16:creationId xmlns:a16="http://schemas.microsoft.com/office/drawing/2014/main" id="{8ACD2BD9-FB76-2169-1742-F18DCB604BA8}"/>
               </a:ext>
             </a:extLst>
           </p:cNvPr>
@@ -2178,7 +2178,7 @@
           <a:bodyPr/>
           <a:lstStyle/>
           <a:p>
-            <a:fld id="{CDF1F171-55D7-4860-B64F-9E59B446BDA1}" type="datetimeFigureOut">
+            <a:fld id="{9962EF84-B6DF-449E-AFEB-FAC94E7545E8}" type="datetimeFigureOut">
               <a:rPr kumimoji="1" lang="ja-JP" altLang="en-US" smtClean="0"/>
               <a:t>2026/7/30</a:t>
             </a:fld>
@@ -2191,7 +2191,7 @@
           <p:cNvPr id="4" name="フッター プレースホルダー 3">
             <a:extLst>
               <a:ext uri="{FF2B5EF4-FFF2-40B4-BE49-F238E27FC236}">
-                <a16:creationId xmlns:a16="http://schemas.microsoft.com/office/drawing/2014/main" id="{34B96565-1382-7092-9E69-09628DB35DC0}"/>
+                <a16:creationId xmlns:a16="http://schemas.microsoft.com/office/drawing/2014/main" id="{D04230E6-6061-B5AA-DEE6-DA0F82682045}"/>
               </a:ext>
             </a:extLst>
           </p:cNvPr>
@@ -2216,7 +2216,7 @@
           <p:cNvPr id="5" name="スライド番号プレースホルダー 4">
             <a:extLst>
               <a:ext uri="{FF2B5EF4-FFF2-40B4-BE49-F238E27FC236}">
-                <a16:creationId xmlns:a16="http://schemas.microsoft.com/office/drawing/2014/main" id="{39FF93A9-0D54-172B-C704-AA24DE29BEE1}"/>
+                <a16:creationId xmlns:a16="http://schemas.microsoft.com/office/drawing/2014/main" id="{32DC8B4C-992F-ACCA-89DD-219ACDC81A0B}"/>
               </a:ext>
             </a:extLst>
           </p:cNvPr>
@@ -2232,7 +2232,7 @@
           <a:bodyPr/>
           <a:lstStyle/>
           <a:p>
-            <a:fld id="{57DB16C9-B3C2-4640-88FF-2EC2C0AE79B8}" type="slidenum">
+            <a:fld id="{4D2E4571-73FA-49EC-BDBA-3E4220AFBD3D}" type="slidenum">
               <a:rPr kumimoji="1" lang="ja-JP" altLang="en-US" smtClean="0"/>
               <a:t>‹#›</a:t>
             </a:fld>
@@ -2243,7 +2243,7 @@
     </p:spTree>
     <p:extLst>
       <p:ext uri="{BB962C8B-B14F-4D97-AF65-F5344CB8AC3E}">
-        <p14:creationId xmlns:p14="http://schemas.microsoft.com/office/powerpoint/2010/main" val="405772566"/>
+        <p14:creationId xmlns:p14="http://schemas.microsoft.com/office/powerpoint/2010/main" val="1360878929"/>
       </p:ext>
     </p:extLst>
   </p:cSld>
@@ -2275,7 +2275,7 @@
           <p:cNvPr id="2" name="日付プレースホルダー 1">
             <a:extLst>
               <a:ext uri="{FF2B5EF4-FFF2-40B4-BE49-F238E27FC236}">
-                <a16:creationId xmlns:a16="http://schemas.microsoft.com/office/drawing/2014/main" id="{89A67DAD-03F2-6492-3343-2C807AD18A6B}"/>
+                <a16:creationId xmlns:a16="http://schemas.microsoft.com/office/drawing/2014/main" id="{D1B22B66-BB57-0D78-8CF7-3D0D4EF27DD6}"/>
               </a:ext>
             </a:extLst>
           </p:cNvPr>
@@ -2291,7 +2291,7 @@
           <a:bodyPr/>
           <a:lstStyle/>
           <a:p>
-            <a:fld id="{CDF1F171-55D7-4860-B64F-9E59B446BDA1}" type="datetimeFigureOut">
+            <a:fld id="{9962EF84-B6DF-449E-AFEB-FAC94E7545E8}" type="datetimeFigureOut">
               <a:rPr kumimoji="1" lang="ja-JP" altLang="en-US" smtClean="0"/>
               <a:t>2026/7/30</a:t>
             </a:fld>
@@ -2304,7 +2304,7 @@
           <p:cNvPr id="3" name="フッター プレースホルダー 2">
             <a:extLst>
               <a:ext uri="{FF2B5EF4-FFF2-40B4-BE49-F238E27FC236}">
-                <a16:creationId xmlns:a16="http://schemas.microsoft.com/office/drawing/2014/main" id="{55042441-527D-1B35-B351-39E4FF7281C2}"/>
+                <a16:creationId xmlns:a16="http://schemas.microsoft.com/office/drawing/2014/main" id="{7259B754-2357-E453-E64A-A645D4CA1B50}"/>
               </a:ext>
             </a:extLst>
           </p:cNvPr>
@@ -2329,7 +2329,7 @@
           <p:cNvPr id="4" name="スライド番号プレースホルダー 3">
             <a:extLst>
               <a:ext uri="{FF2B5EF4-FFF2-40B4-BE49-F238E27FC236}">
-                <a16:creationId xmlns:a16="http://schemas.microsoft.com/office/drawing/2014/main" id="{FF11A455-D726-A5B7-06DA-420CC1F953C2}"/>
+                <a16:creationId xmlns:a16="http://schemas.microsoft.com/office/drawing/2014/main" id="{CA23CF82-5483-E665-9B45-0ECB1BFCA30D}"/>
               </a:ext>
             </a:extLst>
           </p:cNvPr>
@@ -2345,7 +2345,7 @@
           <a:bodyPr/>
           <a:lstStyle/>
           <a:p>
-            <a:fld id="{57DB16C9-B3C2-4640-88FF-2EC2C0AE79B8}" type="slidenum">
+            <a:fld id="{4D2E4571-73FA-49EC-BDBA-3E4220AFBD3D}" type="slidenum">
               <a:rPr kumimoji="1" lang="ja-JP" altLang="en-US" smtClean="0"/>
               <a:t>‹#›</a:t>
             </a:fld>
@@ -2356,7 +2356,7 @@
     </p:spTree>
     <p:extLst>
       <p:ext uri="{BB962C8B-B14F-4D97-AF65-F5344CB8AC3E}">
-        <p14:creationId xmlns:p14="http://schemas.microsoft.com/office/powerpoint/2010/main" val="1796285247"/>
+        <p14:creationId xmlns:p14="http://schemas.microsoft.com/office/powerpoint/2010/main" val="2107841947"/>
       </p:ext>
     </p:extLst>
   </p:cSld>
@@ -2388,7 +2388,7 @@
           <p:cNvPr id="2" name="タイトル 1">
             <a:extLst>
               <a:ext uri="{FF2B5EF4-FFF2-40B4-BE49-F238E27FC236}">
-                <a16:creationId xmlns:a16="http://schemas.microsoft.com/office/drawing/2014/main" id="{B36D88AF-A298-537A-A6CD-17C5495A335D}"/>
+                <a16:creationId xmlns:a16="http://schemas.microsoft.com/office/drawing/2014/main" id="{0811A83C-F733-5981-0094-6660BDBFDBD4}"/>
               </a:ext>
             </a:extLst>
           </p:cNvPr>
@@ -2425,7 +2425,7 @@
           <p:cNvPr id="3" name="コンテンツ プレースホルダー 2">
             <a:extLst>
               <a:ext uri="{FF2B5EF4-FFF2-40B4-BE49-F238E27FC236}">
-                <a16:creationId xmlns:a16="http://schemas.microsoft.com/office/drawing/2014/main" id="{274B7BF0-A726-8416-4025-C1263EB4C5A0}"/>
+                <a16:creationId xmlns:a16="http://schemas.microsoft.com/office/drawing/2014/main" id="{83C142FE-0D61-B466-2019-40E4BACFE481}"/>
               </a:ext>
             </a:extLst>
           </p:cNvPr>
@@ -2547,7 +2547,7 @@
           <p:cNvPr id="4" name="テキスト プレースホルダー 3">
             <a:extLst>
               <a:ext uri="{FF2B5EF4-FFF2-40B4-BE49-F238E27FC236}">
-                <a16:creationId xmlns:a16="http://schemas.microsoft.com/office/drawing/2014/main" id="{2554C85B-82D1-6EF8-77A0-C619F4E5264E}"/>
+                <a16:creationId xmlns:a16="http://schemas.microsoft.com/office/drawing/2014/main" id="{DA7F1274-4B21-901C-0B9D-9311479EA936}"/>
               </a:ext>
             </a:extLst>
           </p:cNvPr>
@@ -2618,7 +2618,7 @@
           <p:cNvPr id="5" name="日付プレースホルダー 4">
             <a:extLst>
               <a:ext uri="{FF2B5EF4-FFF2-40B4-BE49-F238E27FC236}">
-                <a16:creationId xmlns:a16="http://schemas.microsoft.com/office/drawing/2014/main" id="{243C71FE-6058-BC37-B1EE-911973B2202D}"/>
+                <a16:creationId xmlns:a16="http://schemas.microsoft.com/office/drawing/2014/main" id="{11DD4C96-4ADF-7524-4288-A964F310B556}"/>
               </a:ext>
             </a:extLst>
           </p:cNvPr>
@@ -2634,7 +2634,7 @@
           <a:bodyPr/>
           <a:lstStyle/>
           <a:p>
-            <a:fld id="{CDF1F171-55D7-4860-B64F-9E59B446BDA1}" type="datetimeFigureOut">
+            <a:fld id="{9962EF84-B6DF-449E-AFEB-FAC94E7545E8}" type="datetimeFigureOut">
               <a:rPr kumimoji="1" lang="ja-JP" altLang="en-US" smtClean="0"/>
               <a:t>2026/7/30</a:t>
             </a:fld>
@@ -2647,7 +2647,7 @@
           <p:cNvPr id="6" name="フッター プレースホルダー 5">
             <a:extLst>
               <a:ext uri="{FF2B5EF4-FFF2-40B4-BE49-F238E27FC236}">
-                <a16:creationId xmlns:a16="http://schemas.microsoft.com/office/drawing/2014/main" id="{2C3C2731-EE07-7A75-9D38-57618BA229CF}"/>
+                <a16:creationId xmlns:a16="http://schemas.microsoft.com/office/drawing/2014/main" id="{36F4BDE7-E8BE-8A26-BA5E-0B3083556320}"/>
               </a:ext>
             </a:extLst>
           </p:cNvPr>
@@ -2672,7 +2672,7 @@
           <p:cNvPr id="7" name="スライド番号プレースホルダー 6">
             <a:extLst>
               <a:ext uri="{FF2B5EF4-FFF2-40B4-BE49-F238E27FC236}">
-                <a16:creationId xmlns:a16="http://schemas.microsoft.com/office/drawing/2014/main" id="{5CFFBD6B-8D3B-DEA3-9E9D-4F055AE6D7A6}"/>
+                <a16:creationId xmlns:a16="http://schemas.microsoft.com/office/drawing/2014/main" id="{CF8D5ACD-40E4-3508-9676-CA41D3BCAE91}"/>
               </a:ext>
             </a:extLst>
           </p:cNvPr>
@@ -2688,7 +2688,7 @@
           <a:bodyPr/>
           <a:lstStyle/>
           <a:p>
-            <a:fld id="{57DB16C9-B3C2-4640-88FF-2EC2C0AE79B8}" type="slidenum">
+            <a:fld id="{4D2E4571-73FA-49EC-BDBA-3E4220AFBD3D}" type="slidenum">
               <a:rPr kumimoji="1" lang="ja-JP" altLang="en-US" smtClean="0"/>
               <a:t>‹#›</a:t>
             </a:fld>
@@ -2699,7 +2699,7 @@
     </p:spTree>
     <p:extLst>
       <p:ext uri="{BB962C8B-B14F-4D97-AF65-F5344CB8AC3E}">
-        <p14:creationId xmlns:p14="http://schemas.microsoft.com/office/powerpoint/2010/main" val="1536565959"/>
+        <p14:creationId xmlns:p14="http://schemas.microsoft.com/office/powerpoint/2010/main" val="600245448"/>
       </p:ext>
     </p:extLst>
   </p:cSld>
@@ -2731,7 +2731,7 @@
           <p:cNvPr id="2" name="タイトル 1">
             <a:extLst>
               <a:ext uri="{FF2B5EF4-FFF2-40B4-BE49-F238E27FC236}">
-                <a16:creationId xmlns:a16="http://schemas.microsoft.com/office/drawing/2014/main" id="{8FF46A79-D035-AE8B-929E-EB7C6CF92F5E}"/>
+                <a16:creationId xmlns:a16="http://schemas.microsoft.com/office/drawing/2014/main" id="{D9BEB209-E733-638C-C1B8-A5E8F8C65E64}"/>
               </a:ext>
             </a:extLst>
           </p:cNvPr>
@@ -2768,7 +2768,7 @@
           <p:cNvPr id="3" name="図プレースホルダー 2">
             <a:extLst>
               <a:ext uri="{FF2B5EF4-FFF2-40B4-BE49-F238E27FC236}">
-                <a16:creationId xmlns:a16="http://schemas.microsoft.com/office/drawing/2014/main" id="{F572E442-1D66-30FC-F8EB-75BE94EC3FF5}"/>
+                <a16:creationId xmlns:a16="http://schemas.microsoft.com/office/drawing/2014/main" id="{C8090FD3-55EF-56F9-FDE0-5CDBCA3D3E11}"/>
               </a:ext>
             </a:extLst>
           </p:cNvPr>
@@ -2835,7 +2835,7 @@
           <p:cNvPr id="4" name="テキスト プレースホルダー 3">
             <a:extLst>
               <a:ext uri="{FF2B5EF4-FFF2-40B4-BE49-F238E27FC236}">
-                <a16:creationId xmlns:a16="http://schemas.microsoft.com/office/drawing/2014/main" id="{09B7A2E8-3D05-9151-2BC6-9C05E9B3DBEE}"/>
+                <a16:creationId xmlns:a16="http://schemas.microsoft.com/office/drawing/2014/main" id="{93260495-731C-52A4-96C1-F5E4992259C9}"/>
               </a:ext>
             </a:extLst>
           </p:cNvPr>
@@ -2906,7 +2906,7 @@
           <p:cNvPr id="5" name="日付プレースホルダー 4">
             <a:extLst>
               <a:ext uri="{FF2B5EF4-FFF2-40B4-BE49-F238E27FC236}">
-                <a16:creationId xmlns:a16="http://schemas.microsoft.com/office/drawing/2014/main" id="{F6E21281-BEE5-FF8F-540E-BC2975FB67C1}"/>
+                <a16:creationId xmlns:a16="http://schemas.microsoft.com/office/drawing/2014/main" id="{25257DA5-E91C-1DC2-8813-0494605D4D5E}"/>
               </a:ext>
             </a:extLst>
           </p:cNvPr>
@@ -2922,7 +2922,7 @@
           <a:bodyPr/>
           <a:lstStyle/>
           <a:p>
-            <a:fld id="{CDF1F171-55D7-4860-B64F-9E59B446BDA1}" type="datetimeFigureOut">
+            <a:fld id="{9962EF84-B6DF-449E-AFEB-FAC94E7545E8}" type="datetimeFigureOut">
               <a:rPr kumimoji="1" lang="ja-JP" altLang="en-US" smtClean="0"/>
               <a:t>2026/7/30</a:t>
             </a:fld>
@@ -2935,7 +2935,7 @@
           <p:cNvPr id="6" name="フッター プレースホルダー 5">
             <a:extLst>
               <a:ext uri="{FF2B5EF4-FFF2-40B4-BE49-F238E27FC236}">
-                <a16:creationId xmlns:a16="http://schemas.microsoft.com/office/drawing/2014/main" id="{30371A83-F7CE-760E-6AD1-C4C98E57B4EF}"/>
+                <a16:creationId xmlns:a16="http://schemas.microsoft.com/office/drawing/2014/main" id="{04359964-6539-AE04-01B8-E7D4FB648567}"/>
               </a:ext>
             </a:extLst>
           </p:cNvPr>
@@ -2960,7 +2960,7 @@
           <p:cNvPr id="7" name="スライド番号プレースホルダー 6">
             <a:extLst>
               <a:ext uri="{FF2B5EF4-FFF2-40B4-BE49-F238E27FC236}">
-                <a16:creationId xmlns:a16="http://schemas.microsoft.com/office/drawing/2014/main" id="{A266779F-4E6F-7B47-829B-651C8D96E5E0}"/>
+                <a16:creationId xmlns:a16="http://schemas.microsoft.com/office/drawing/2014/main" id="{E276B898-D69C-3B43-B908-F22CAC377F25}"/>
               </a:ext>
             </a:extLst>
           </p:cNvPr>
@@ -2976,7 +2976,7 @@
           <a:bodyPr/>
           <a:lstStyle/>
           <a:p>
-            <a:fld id="{57DB16C9-B3C2-4640-88FF-2EC2C0AE79B8}" type="slidenum">
+            <a:fld id="{4D2E4571-73FA-49EC-BDBA-3E4220AFBD3D}" type="slidenum">
               <a:rPr kumimoji="1" lang="ja-JP" altLang="en-US" smtClean="0"/>
               <a:t>‹#›</a:t>
             </a:fld>
@@ -2987,7 +2987,7 @@
     </p:spTree>
     <p:extLst>
       <p:ext uri="{BB962C8B-B14F-4D97-AF65-F5344CB8AC3E}">
-        <p14:creationId xmlns:p14="http://schemas.microsoft.com/office/powerpoint/2010/main" val="3096603631"/>
+        <p14:creationId xmlns:p14="http://schemas.microsoft.com/office/powerpoint/2010/main" val="27732921"/>
       </p:ext>
     </p:extLst>
   </p:cSld>
@@ -3024,7 +3024,7 @@
           <p:cNvPr id="2" name="タイトル プレースホルダー 1">
             <a:extLst>
               <a:ext uri="{FF2B5EF4-FFF2-40B4-BE49-F238E27FC236}">
-                <a16:creationId xmlns:a16="http://schemas.microsoft.com/office/drawing/2014/main" id="{92354469-C7A6-C600-567E-24C6771A2CE2}"/>
+                <a16:creationId xmlns:a16="http://schemas.microsoft.com/office/drawing/2014/main" id="{336DAA91-4021-3952-916F-C8B79BC505E7}"/>
               </a:ext>
             </a:extLst>
           </p:cNvPr>
@@ -3062,7 +3062,7 @@
           <p:cNvPr id="3" name="テキスト プレースホルダー 2">
             <a:extLst>
               <a:ext uri="{FF2B5EF4-FFF2-40B4-BE49-F238E27FC236}">
-                <a16:creationId xmlns:a16="http://schemas.microsoft.com/office/drawing/2014/main" id="{5189A031-EDAE-7005-E242-91DFC761125F}"/>
+                <a16:creationId xmlns:a16="http://schemas.microsoft.com/office/drawing/2014/main" id="{ABCA4BB2-29D3-584B-8AA7-B76426936E69}"/>
               </a:ext>
             </a:extLst>
           </p:cNvPr>
@@ -3161,7 +3161,7 @@
           <p:cNvPr id="4" name="日付プレースホルダー 3">
             <a:extLst>
               <a:ext uri="{FF2B5EF4-FFF2-40B4-BE49-F238E27FC236}">
-                <a16:creationId xmlns:a16="http://schemas.microsoft.com/office/drawing/2014/main" id="{F003184E-960A-9AB2-96A9-8379112082B2}"/>
+                <a16:creationId xmlns:a16="http://schemas.microsoft.com/office/drawing/2014/main" id="{6E20872F-5A44-74E8-7E4F-B476D2052A9A}"/>
               </a:ext>
             </a:extLst>
           </p:cNvPr>
@@ -3195,7 +3195,7 @@
             </a:lvl1pPr>
           </a:lstStyle>
           <a:p>
-            <a:fld id="{CDF1F171-55D7-4860-B64F-9E59B446BDA1}" type="datetimeFigureOut">
+            <a:fld id="{9962EF84-B6DF-449E-AFEB-FAC94E7545E8}" type="datetimeFigureOut">
               <a:rPr kumimoji="1" lang="ja-JP" altLang="en-US" smtClean="0"/>
               <a:t>2026/7/30</a:t>
             </a:fld>
@@ -3208,7 +3208,7 @@
           <p:cNvPr id="5" name="フッター プレースホルダー 4">
             <a:extLst>
               <a:ext uri="{FF2B5EF4-FFF2-40B4-BE49-F238E27FC236}">
-                <a16:creationId xmlns:a16="http://schemas.microsoft.com/office/drawing/2014/main" id="{D519158E-95B7-6AC1-BCB8-AD22394E01FB}"/>
+                <a16:creationId xmlns:a16="http://schemas.microsoft.com/office/drawing/2014/main" id="{7170390B-96DA-8367-162F-5B0D98EEA6F0}"/>
               </a:ext>
             </a:extLst>
           </p:cNvPr>
@@ -3251,7 +3251,7 @@
           <p:cNvPr id="6" name="スライド番号プレースホルダー 5">
             <a:extLst>
               <a:ext uri="{FF2B5EF4-FFF2-40B4-BE49-F238E27FC236}">
-                <a16:creationId xmlns:a16="http://schemas.microsoft.com/office/drawing/2014/main" id="{760E6ECD-3B2A-D884-0FB4-1483F5E19624}"/>
+                <a16:creationId xmlns:a16="http://schemas.microsoft.com/office/drawing/2014/main" id="{E5E497DD-D1BF-498C-8EDE-462982B0669F}"/>
               </a:ext>
             </a:extLst>
           </p:cNvPr>
@@ -3285,7 +3285,7 @@
             </a:lvl1pPr>
           </a:lstStyle>
           <a:p>
-            <a:fld id="{57DB16C9-B3C2-4640-88FF-2EC2C0AE79B8}" type="slidenum">
+            <a:fld id="{4D2E4571-73FA-49EC-BDBA-3E4220AFBD3D}" type="slidenum">
               <a:rPr kumimoji="1" lang="ja-JP" altLang="en-US" smtClean="0"/>
               <a:t>‹#›</a:t>
             </a:fld>
@@ -3296,7 +3296,7 @@
     </p:spTree>
     <p:extLst>
       <p:ext uri="{BB962C8B-B14F-4D97-AF65-F5344CB8AC3E}">
-        <p14:creationId xmlns:p14="http://schemas.microsoft.com/office/powerpoint/2010/main" val="469376125"/>
+        <p14:creationId xmlns:p14="http://schemas.microsoft.com/office/powerpoint/2010/main" val="1826735766"/>
       </p:ext>
     </p:extLst>
   </p:cSld>
@@ -3619,7 +3619,7 @@
           <p:cNvPr id="2" name="テキスト ボックス 1">
             <a:extLst>
               <a:ext uri="{FF2B5EF4-FFF2-40B4-BE49-F238E27FC236}">
-                <a16:creationId xmlns:a16="http://schemas.microsoft.com/office/drawing/2014/main" id="{BE19DEDE-DBDD-020E-318E-A2B25E005829}"/>
+                <a16:creationId xmlns:a16="http://schemas.microsoft.com/office/drawing/2014/main" id="{2DBDCF86-DDDE-27EA-C065-4DB07AB12D44}"/>
               </a:ext>
             </a:extLst>
           </p:cNvPr>
@@ -3665,7 +3665,7 @@
           <p:cNvPr id="3" name="テキスト ボックス 2">
             <a:extLst>
               <a:ext uri="{FF2B5EF4-FFF2-40B4-BE49-F238E27FC236}">
-                <a16:creationId xmlns:a16="http://schemas.microsoft.com/office/drawing/2014/main" id="{F3232943-C61D-D1FC-F4B3-48F42D316ECF}"/>
+                <a16:creationId xmlns:a16="http://schemas.microsoft.com/office/drawing/2014/main" id="{6A991F48-5F92-02F2-D836-33F88927C624}"/>
               </a:ext>
             </a:extLst>
           </p:cNvPr>
@@ -3695,14 +3695,17 @@
                 </a:solidFill>
                 <a:latin typeface="Arial" panose="020B0604020202020204" pitchFamily="34" charset="0"/>
               </a:rPr>
-              <a:t>kousokubus-benri TECH EXPLANATION</a:t>
-            </a:r>
-            <a:endParaRPr kumimoji="1" lang="ja-JP" altLang="en-US" sz="3400" b="1">
-              <a:solidFill>
-                <a:srgbClr val="111111"/>
-              </a:solidFill>
-              <a:latin typeface="Arial" panose="020B0604020202020204" pitchFamily="34" charset="0"/>
-            </a:endParaRPr>
+              <a:t>Kousokubus Benri</a:t>
+            </a:r>
+            <a:r>
+              <a:rPr kumimoji="1" lang="ja-JP" altLang="en-US" sz="3400" b="1">
+                <a:solidFill>
+                  <a:srgbClr val="111111"/>
+                </a:solidFill>
+                <a:latin typeface="Arial" panose="020B0604020202020204" pitchFamily="34" charset="0"/>
+              </a:rPr>
+              <a:t>の技術解説</a:t>
+            </a:r>
           </a:p>
         </p:txBody>
       </p:sp>
@@ -3711,7 +3714,7 @@
           <p:cNvPr id="4" name="テキスト ボックス 3">
             <a:extLst>
               <a:ext uri="{FF2B5EF4-FFF2-40B4-BE49-F238E27FC236}">
-                <a16:creationId xmlns:a16="http://schemas.microsoft.com/office/drawing/2014/main" id="{39BE14EF-9BF8-F894-0B24-2BEE32D846BA}"/>
+                <a16:creationId xmlns:a16="http://schemas.microsoft.com/office/drawing/2014/main" id="{66147510-04AA-7020-8544-C3664D5F465C}"/>
               </a:ext>
             </a:extLst>
           </p:cNvPr>
@@ -3735,20 +3738,14 @@
           <a:lstStyle/>
           <a:p>
             <a:r>
-              <a:rPr kumimoji="1" lang="en-US" altLang="ja-JP" sz="2000">
+              <a:rPr kumimoji="1" lang="ja-JP" altLang="en-US" sz="2000">
                 <a:solidFill>
                   <a:srgbClr val="333333"/>
                 </a:solidFill>
                 <a:latin typeface="Arial" panose="020B0604020202020204" pitchFamily="34" charset="0"/>
               </a:rPr>
-              <a:t>Architecture, implementation and commit history in 75 seconds</a:t>
-            </a:r>
-            <a:endParaRPr kumimoji="1" lang="ja-JP" altLang="en-US" sz="2000">
-              <a:solidFill>
-                <a:srgbClr val="333333"/>
-              </a:solidFill>
-              <a:latin typeface="Arial" panose="020B0604020202020204" pitchFamily="34" charset="0"/>
-            </a:endParaRPr>
+              <a:t>設計・実装・コミットから学ぶ短時間プレビュー</a:t>
+            </a:r>
           </a:p>
         </p:txBody>
       </p:sp>
@@ -3757,7 +3754,7 @@
           <p:cNvPr id="5" name="テキスト ボックス 4">
             <a:extLst>
               <a:ext uri="{FF2B5EF4-FFF2-40B4-BE49-F238E27FC236}">
-                <a16:creationId xmlns:a16="http://schemas.microsoft.com/office/drawing/2014/main" id="{E5E3D98F-C479-BA9F-AD1F-A97D5A7423ED}"/>
+                <a16:creationId xmlns:a16="http://schemas.microsoft.com/office/drawing/2014/main" id="{48F6D861-715A-EE9D-8931-90B91580B444}"/>
               </a:ext>
             </a:extLst>
           </p:cNvPr>
@@ -3804,7 +3801,7 @@
             <a:hlinkClick r:id="" action="ppaction://media"/>
             <a:extLst>
               <a:ext uri="{FF2B5EF4-FFF2-40B4-BE49-F238E27FC236}">
-                <a16:creationId xmlns:a16="http://schemas.microsoft.com/office/drawing/2014/main" id="{C566AE20-ABFC-E201-9F98-A7116732CF6A}"/>
+                <a16:creationId xmlns:a16="http://schemas.microsoft.com/office/drawing/2014/main" id="{63FD4874-ECB8-A3A3-F8D4-4CD0B01A1529}"/>
               </a:ext>
             </a:extLst>
           </p:cNvPr>
@@ -3839,7 +3836,7 @@
     </p:spTree>
     <p:extLst>
       <p:ext uri="{BB962C8B-B14F-4D97-AF65-F5344CB8AC3E}">
-        <p14:creationId xmlns:p14="http://schemas.microsoft.com/office/powerpoint/2010/main" val="4288635748"/>
+        <p14:creationId xmlns:p14="http://schemas.microsoft.com/office/powerpoint/2010/main" val="1748872642"/>
       </p:ext>
     </p:extLst>
   </p:cSld>
@@ -3963,7 +3960,7 @@
           <p:cNvPr id="2" name="テキスト ボックス 1">
             <a:extLst>
               <a:ext uri="{FF2B5EF4-FFF2-40B4-BE49-F238E27FC236}">
-                <a16:creationId xmlns:a16="http://schemas.microsoft.com/office/drawing/2014/main" id="{8B9350E1-1A10-D86D-EC50-89208D4EBDD2}"/>
+                <a16:creationId xmlns:a16="http://schemas.microsoft.com/office/drawing/2014/main" id="{2E42B8CB-30E0-B9F0-9923-C5B7A37DE53C}"/>
               </a:ext>
             </a:extLst>
           </p:cNvPr>
@@ -4009,7 +4006,7 @@
           <p:cNvPr id="3" name="テキスト ボックス 2">
             <a:extLst>
               <a:ext uri="{FF2B5EF4-FFF2-40B4-BE49-F238E27FC236}">
-                <a16:creationId xmlns:a16="http://schemas.microsoft.com/office/drawing/2014/main" id="{30642B1B-AC68-B978-D89F-A3E99FD4BF30}"/>
+                <a16:creationId xmlns:a16="http://schemas.microsoft.com/office/drawing/2014/main" id="{79DEA002-E0CD-05E3-A490-DD7769C137BE}"/>
               </a:ext>
             </a:extLst>
           </p:cNvPr>
@@ -4033,20 +4030,14 @@
           <a:lstStyle/>
           <a:p>
             <a:r>
-              <a:rPr kumimoji="1" lang="en-US" altLang="ja-JP" sz="3400" b="1">
+              <a:rPr kumimoji="1" lang="ja-JP" altLang="en-US" sz="3400" b="1">
                 <a:solidFill>
                   <a:srgbClr val="111111"/>
                 </a:solidFill>
                 <a:latin typeface="Arial" panose="020B0604020202020204" pitchFamily="34" charset="0"/>
               </a:rPr>
-              <a:t>WHAT DOES IT SOLVE?</a:t>
-            </a:r>
-            <a:endParaRPr kumimoji="1" lang="ja-JP" altLang="en-US" sz="3400" b="1">
-              <a:solidFill>
-                <a:srgbClr val="111111"/>
-              </a:solidFill>
-              <a:latin typeface="Arial" panose="020B0604020202020204" pitchFamily="34" charset="0"/>
-            </a:endParaRPr>
+              <a:t>このプロジェクトは何を解決する？</a:t>
+            </a:r>
           </a:p>
         </p:txBody>
       </p:sp>
@@ -4055,7 +4046,7 @@
           <p:cNvPr id="4" name="テキスト ボックス 3">
             <a:extLst>
               <a:ext uri="{FF2B5EF4-FFF2-40B4-BE49-F238E27FC236}">
-                <a16:creationId xmlns:a16="http://schemas.microsoft.com/office/drawing/2014/main" id="{2AD9742D-EF6C-87DA-BA5A-F55E8D9E9C38}"/>
+                <a16:creationId xmlns:a16="http://schemas.microsoft.com/office/drawing/2014/main" id="{2BF3B88C-5F01-74A6-7914-D4C74C4B87BA}"/>
               </a:ext>
             </a:extLst>
           </p:cNvPr>
@@ -4101,7 +4092,7 @@
           <p:cNvPr id="5" name="テキスト ボックス 4">
             <a:extLst>
               <a:ext uri="{FF2B5EF4-FFF2-40B4-BE49-F238E27FC236}">
-                <a16:creationId xmlns:a16="http://schemas.microsoft.com/office/drawing/2014/main" id="{CD70E613-C26E-BA85-F4AA-6514B1D87206}"/>
+                <a16:creationId xmlns:a16="http://schemas.microsoft.com/office/drawing/2014/main" id="{BA1FDC75-A264-B046-897C-675E363AFBD4}"/>
               </a:ext>
             </a:extLst>
           </p:cNvPr>
@@ -4148,7 +4139,7 @@
             <a:hlinkClick r:id="" action="ppaction://media"/>
             <a:extLst>
               <a:ext uri="{FF2B5EF4-FFF2-40B4-BE49-F238E27FC236}">
-                <a16:creationId xmlns:a16="http://schemas.microsoft.com/office/drawing/2014/main" id="{A8519C6E-0D8D-C478-2BD9-A5299A78F911}"/>
+                <a16:creationId xmlns:a16="http://schemas.microsoft.com/office/drawing/2014/main" id="{8D71915D-B93E-1E36-7BB7-083167EA34BC}"/>
               </a:ext>
             </a:extLst>
           </p:cNvPr>
@@ -4183,7 +4174,7 @@
     </p:spTree>
     <p:extLst>
       <p:ext uri="{BB962C8B-B14F-4D97-AF65-F5344CB8AC3E}">
-        <p14:creationId xmlns:p14="http://schemas.microsoft.com/office/powerpoint/2010/main" val="4115516271"/>
+        <p14:creationId xmlns:p14="http://schemas.microsoft.com/office/powerpoint/2010/main" val="919703155"/>
       </p:ext>
     </p:extLst>
   </p:cSld>
@@ -4307,7 +4298,7 @@
           <p:cNvPr id="2" name="テキスト ボックス 1">
             <a:extLst>
               <a:ext uri="{FF2B5EF4-FFF2-40B4-BE49-F238E27FC236}">
-                <a16:creationId xmlns:a16="http://schemas.microsoft.com/office/drawing/2014/main" id="{4BE0E762-FD34-BC90-08F7-D3332A48DEA9}"/>
+                <a16:creationId xmlns:a16="http://schemas.microsoft.com/office/drawing/2014/main" id="{F2786B3D-079A-E3FB-A6AF-D8AE35E5B8EE}"/>
               </a:ext>
             </a:extLst>
           </p:cNvPr>
@@ -4353,7 +4344,7 @@
           <p:cNvPr id="3" name="テキスト ボックス 2">
             <a:extLst>
               <a:ext uri="{FF2B5EF4-FFF2-40B4-BE49-F238E27FC236}">
-                <a16:creationId xmlns:a16="http://schemas.microsoft.com/office/drawing/2014/main" id="{CE3654D9-C9BE-E121-58ED-08362FB6DBF1}"/>
+                <a16:creationId xmlns:a16="http://schemas.microsoft.com/office/drawing/2014/main" id="{334BFAE5-6ECD-A9D7-7FA3-3B06095687BB}"/>
               </a:ext>
             </a:extLst>
           </p:cNvPr>
@@ -4377,20 +4368,14 @@
           <a:lstStyle/>
           <a:p>
             <a:r>
-              <a:rPr kumimoji="1" lang="en-US" altLang="ja-JP" sz="3400" b="1">
+              <a:rPr kumimoji="1" lang="ja-JP" altLang="en-US" sz="3400" b="1">
                 <a:solidFill>
                   <a:srgbClr val="111111"/>
                 </a:solidFill>
                 <a:latin typeface="Arial" panose="020B0604020202020204" pitchFamily="34" charset="0"/>
               </a:rPr>
-              <a:t>TECH STACK</a:t>
-            </a:r>
-            <a:endParaRPr kumimoji="1" lang="ja-JP" altLang="en-US" sz="3400" b="1">
-              <a:solidFill>
-                <a:srgbClr val="111111"/>
-              </a:solidFill>
-              <a:latin typeface="Arial" panose="020B0604020202020204" pitchFamily="34" charset="0"/>
-            </a:endParaRPr>
+              <a:t>技術スタック</a:t>
+            </a:r>
           </a:p>
         </p:txBody>
       </p:sp>
@@ -4399,7 +4384,7 @@
           <p:cNvPr id="4" name="テキスト ボックス 3">
             <a:extLst>
               <a:ext uri="{FF2B5EF4-FFF2-40B4-BE49-F238E27FC236}">
-                <a16:creationId xmlns:a16="http://schemas.microsoft.com/office/drawing/2014/main" id="{D8FB1700-C7C3-9FD2-B8A7-3284D3B38C18}"/>
+                <a16:creationId xmlns:a16="http://schemas.microsoft.com/office/drawing/2014/main" id="{C7D02482-B35D-A7AF-6191-8CECB6E99E86}"/>
               </a:ext>
             </a:extLst>
           </p:cNvPr>
@@ -4409,7 +4394,7 @@
         <p:spPr>
           <a:xfrm>
             <a:off x="533400" y="3429000"/>
-            <a:ext cx="10795000" cy="400110"/>
+            <a:ext cx="10795000" cy="707886"/>
           </a:xfrm>
           <a:prstGeom prst="rect">
             <a:avLst/>
@@ -4423,13 +4408,22 @@
           <a:lstStyle/>
           <a:p>
             <a:r>
+              <a:rPr kumimoji="1" lang="ja-JP" altLang="en-US" sz="2000">
+                <a:solidFill>
+                  <a:srgbClr val="333333"/>
+                </a:solidFill>
+                <a:latin typeface="Arial" panose="020B0604020202020204" pitchFamily="34" charset="0"/>
+              </a:rPr>
+              <a:t>主要技術：</a:t>
+            </a:r>
+            <a:r>
               <a:rPr kumimoji="1" lang="en-US" altLang="ja-JP" sz="2000">
                 <a:solidFill>
                   <a:srgbClr val="333333"/>
                 </a:solidFill>
                 <a:latin typeface="Arial" panose="020B0604020202020204" pitchFamily="34" charset="0"/>
               </a:rPr>
-              <a:t>Primary technologies: TypeScript</a:t>
+              <a:t>TypeScript</a:t>
             </a:r>
             <a:r>
               <a:rPr kumimoji="1" lang="ja-JP" altLang="en-US" sz="2000">
@@ -4447,14 +4441,18 @@
                 </a:solidFill>
                 <a:latin typeface="Arial" panose="020B0604020202020204" pitchFamily="34" charset="0"/>
               </a:rPr>
-              <a:t>JavaScript</a:t>
-            </a:r>
-            <a:endParaRPr kumimoji="1" lang="ja-JP" altLang="en-US" sz="2000">
-              <a:solidFill>
-                <a:srgbClr val="333333"/>
-              </a:solidFill>
-              <a:latin typeface="Arial" panose="020B0604020202020204" pitchFamily="34" charset="0"/>
-            </a:endParaRPr>
+              <a:t>JavaScript
+</a:t>
+            </a:r>
+            <a:r>
+              <a:rPr kumimoji="1" lang="ja-JP" altLang="en-US" sz="2000">
+                <a:solidFill>
+                  <a:srgbClr val="333333"/>
+                </a:solidFill>
+                <a:latin typeface="Arial" panose="020B0604020202020204" pitchFamily="34" charset="0"/>
+              </a:rPr>
+              <a:t>役割を分け、保守しやすい構成を目指しています。</a:t>
+            </a:r>
           </a:p>
         </p:txBody>
       </p:sp>
@@ -4463,7 +4461,7 @@
           <p:cNvPr id="5" name="テキスト ボックス 4">
             <a:extLst>
               <a:ext uri="{FF2B5EF4-FFF2-40B4-BE49-F238E27FC236}">
-                <a16:creationId xmlns:a16="http://schemas.microsoft.com/office/drawing/2014/main" id="{649E8980-7A90-7690-0D48-57F57B605B7E}"/>
+                <a16:creationId xmlns:a16="http://schemas.microsoft.com/office/drawing/2014/main" id="{C5DF25C4-DFDB-B207-1905-F57EE4132A89}"/>
               </a:ext>
             </a:extLst>
           </p:cNvPr>
@@ -4510,7 +4508,7 @@
             <a:hlinkClick r:id="" action="ppaction://media"/>
             <a:extLst>
               <a:ext uri="{FF2B5EF4-FFF2-40B4-BE49-F238E27FC236}">
-                <a16:creationId xmlns:a16="http://schemas.microsoft.com/office/drawing/2014/main" id="{384BA867-D0B3-C3F2-6A02-C9B3EBD9C201}"/>
+                <a16:creationId xmlns:a16="http://schemas.microsoft.com/office/drawing/2014/main" id="{E61F5B31-6F9F-54AE-3213-CBD1D43DA19E}"/>
               </a:ext>
             </a:extLst>
           </p:cNvPr>
@@ -4545,7 +4543,7 @@
     </p:spTree>
     <p:extLst>
       <p:ext uri="{BB962C8B-B14F-4D97-AF65-F5344CB8AC3E}">
-        <p14:creationId xmlns:p14="http://schemas.microsoft.com/office/powerpoint/2010/main" val="3764368113"/>
+        <p14:creationId xmlns:p14="http://schemas.microsoft.com/office/powerpoint/2010/main" val="2779599427"/>
       </p:ext>
     </p:extLst>
   </p:cSld>
@@ -4669,7 +4667,7 @@
           <p:cNvPr id="2" name="テキスト ボックス 1">
             <a:extLst>
               <a:ext uri="{FF2B5EF4-FFF2-40B4-BE49-F238E27FC236}">
-                <a16:creationId xmlns:a16="http://schemas.microsoft.com/office/drawing/2014/main" id="{3393C3B9-5E3E-ADE8-7EAE-53229CB01F79}"/>
+                <a16:creationId xmlns:a16="http://schemas.microsoft.com/office/drawing/2014/main" id="{A5B1D73D-35C3-50F6-E48E-08578286F7AC}"/>
               </a:ext>
             </a:extLst>
           </p:cNvPr>
@@ -4715,7 +4713,7 @@
           <p:cNvPr id="3" name="テキスト ボックス 2">
             <a:extLst>
               <a:ext uri="{FF2B5EF4-FFF2-40B4-BE49-F238E27FC236}">
-                <a16:creationId xmlns:a16="http://schemas.microsoft.com/office/drawing/2014/main" id="{76A42CC3-8327-018C-D8B8-E69B9815D566}"/>
+                <a16:creationId xmlns:a16="http://schemas.microsoft.com/office/drawing/2014/main" id="{04D2CDAD-027F-F784-FD37-487ED8BCB6B8}"/>
               </a:ext>
             </a:extLst>
           </p:cNvPr>
@@ -4739,20 +4737,14 @@
           <a:lstStyle/>
           <a:p>
             <a:r>
-              <a:rPr kumimoji="1" lang="en-US" altLang="ja-JP" sz="3400" b="1">
+              <a:rPr kumimoji="1" lang="ja-JP" altLang="en-US" sz="3400" b="1">
                 <a:solidFill>
                   <a:srgbClr val="111111"/>
                 </a:solidFill>
                 <a:latin typeface="Arial" panose="020B0604020202020204" pitchFamily="34" charset="0"/>
               </a:rPr>
-              <a:t>REPOSITORY HIGHLIGHTS</a:t>
-            </a:r>
-            <a:endParaRPr kumimoji="1" lang="ja-JP" altLang="en-US" sz="3400" b="1">
-              <a:solidFill>
-                <a:srgbClr val="111111"/>
-              </a:solidFill>
-              <a:latin typeface="Arial" panose="020B0604020202020204" pitchFamily="34" charset="0"/>
-            </a:endParaRPr>
+              <a:t>リポジトリの読みどころ</a:t>
+            </a:r>
           </a:p>
         </p:txBody>
       </p:sp>
@@ -4761,7 +4753,7 @@
           <p:cNvPr id="4" name="テキスト ボックス 3">
             <a:extLst>
               <a:ext uri="{FF2B5EF4-FFF2-40B4-BE49-F238E27FC236}">
-                <a16:creationId xmlns:a16="http://schemas.microsoft.com/office/drawing/2014/main" id="{1DE79FF6-B23A-B2B3-A0E8-A2068CBE5BA9}"/>
+                <a16:creationId xmlns:a16="http://schemas.microsoft.com/office/drawing/2014/main" id="{8F349DFF-96CF-00DB-DC4E-B90A165A6CC3}"/>
               </a:ext>
             </a:extLst>
           </p:cNvPr>
@@ -4771,7 +4763,7 @@
         <p:spPr>
           <a:xfrm>
             <a:off x="533400" y="3429000"/>
-            <a:ext cx="10795000" cy="400110"/>
+            <a:ext cx="10795000" cy="707886"/>
           </a:xfrm>
           <a:prstGeom prst="rect">
             <a:avLst/>
@@ -4785,13 +4777,77 @@
           <a:lstStyle/>
           <a:p>
             <a:r>
+              <a:rPr kumimoji="1" lang="ja-JP" altLang="en-US" sz="2000">
+                <a:solidFill>
+                  <a:srgbClr val="333333"/>
+                </a:solidFill>
+                <a:latin typeface="Arial" panose="020B0604020202020204" pitchFamily="34" charset="0"/>
+              </a:rPr>
+              <a:t>公開コード、</a:t>
+            </a:r>
+            <a:r>
               <a:rPr kumimoji="1" lang="en-US" altLang="ja-JP" sz="2000">
                 <a:solidFill>
                   <a:srgbClr val="333333"/>
                 </a:solidFill>
                 <a:latin typeface="Arial" panose="020B0604020202020204" pitchFamily="34" charset="0"/>
               </a:rPr>
-              <a:t>Public source code, README and commit history reveal the design decisions.</a:t>
+              <a:t>README</a:t>
+            </a:r>
+            <a:r>
+              <a:rPr kumimoji="1" lang="ja-JP" altLang="en-US" sz="2000">
+                <a:solidFill>
+                  <a:srgbClr val="333333"/>
+                </a:solidFill>
+                <a:latin typeface="Arial" panose="020B0604020202020204" pitchFamily="34" charset="0"/>
+              </a:rPr>
+              <a:t>、コミット履歴から設計判断を確認できます。
+主なファイル：</a:t>
+            </a:r>
+            <a:r>
+              <a:rPr kumimoji="1" lang="en-US" altLang="ja-JP" sz="2000">
+                <a:solidFill>
+                  <a:srgbClr val="333333"/>
+                </a:solidFill>
+                <a:latin typeface="Arial" panose="020B0604020202020204" pitchFamily="34" charset="0"/>
+              </a:rPr>
+              <a:t>README.md</a:t>
+            </a:r>
+            <a:r>
+              <a:rPr kumimoji="1" lang="ja-JP" altLang="en-US" sz="2000">
+                <a:solidFill>
+                  <a:srgbClr val="333333"/>
+                </a:solidFill>
+                <a:latin typeface="Arial" panose="020B0604020202020204" pitchFamily="34" charset="0"/>
+              </a:rPr>
+              <a:t>、</a:t>
+            </a:r>
+            <a:r>
+              <a:rPr kumimoji="1" lang="en-US" altLang="ja-JP" sz="2000">
+                <a:solidFill>
+                  <a:srgbClr val="333333"/>
+                </a:solidFill>
+                <a:latin typeface="Arial" panose="020B0604020202020204" pitchFamily="34" charset="0"/>
+              </a:rPr>
+              <a:t>app</a:t>
+            </a:r>
+            <a:r>
+              <a:rPr kumimoji="1" lang="ja-JP" altLang="en-US" sz="2000">
+                <a:solidFill>
+                  <a:srgbClr val="333333"/>
+                </a:solidFill>
+                <a:latin typeface="Arial" panose="020B0604020202020204" pitchFamily="34" charset="0"/>
+              </a:rPr>
+              <a:t>、</a:t>
+            </a:r>
+            <a:r>
+              <a:rPr kumimoji="1" lang="en-US" altLang="ja-JP" sz="2000">
+                <a:solidFill>
+                  <a:srgbClr val="333333"/>
+                </a:solidFill>
+                <a:latin typeface="Arial" panose="020B0604020202020204" pitchFamily="34" charset="0"/>
+              </a:rPr>
+              <a:t>build</a:t>
             </a:r>
             <a:endParaRPr kumimoji="1" lang="ja-JP" altLang="en-US" sz="2000">
               <a:solidFill>
@@ -4807,7 +4863,7 @@
           <p:cNvPr id="5" name="テキスト ボックス 4">
             <a:extLst>
               <a:ext uri="{FF2B5EF4-FFF2-40B4-BE49-F238E27FC236}">
-                <a16:creationId xmlns:a16="http://schemas.microsoft.com/office/drawing/2014/main" id="{01791DD1-8F3D-BA7C-F727-C3071C627799}"/>
+                <a16:creationId xmlns:a16="http://schemas.microsoft.com/office/drawing/2014/main" id="{1F8E9ACD-8100-617E-B8FF-4CA3477F2CA4}"/>
               </a:ext>
             </a:extLst>
           </p:cNvPr>
@@ -4854,7 +4910,7 @@
             <a:hlinkClick r:id="" action="ppaction://media"/>
             <a:extLst>
               <a:ext uri="{FF2B5EF4-FFF2-40B4-BE49-F238E27FC236}">
-                <a16:creationId xmlns:a16="http://schemas.microsoft.com/office/drawing/2014/main" id="{28B76880-FBD3-C838-B396-C510EE528124}"/>
+                <a16:creationId xmlns:a16="http://schemas.microsoft.com/office/drawing/2014/main" id="{FE2E8E07-C218-C6F2-4CEB-79D0102B61F5}"/>
               </a:ext>
             </a:extLst>
           </p:cNvPr>
@@ -4889,7 +4945,7 @@
     </p:spTree>
     <p:extLst>
       <p:ext uri="{BB962C8B-B14F-4D97-AF65-F5344CB8AC3E}">
-        <p14:creationId xmlns:p14="http://schemas.microsoft.com/office/powerpoint/2010/main" val="2268007053"/>
+        <p14:creationId xmlns:p14="http://schemas.microsoft.com/office/powerpoint/2010/main" val="1788271069"/>
       </p:ext>
     </p:extLst>
   </p:cSld>
@@ -5013,7 +5069,7 @@
           <p:cNvPr id="2" name="テキスト ボックス 1">
             <a:extLst>
               <a:ext uri="{FF2B5EF4-FFF2-40B4-BE49-F238E27FC236}">
-                <a16:creationId xmlns:a16="http://schemas.microsoft.com/office/drawing/2014/main" id="{8C37E914-8118-87E1-B1A6-5883A5BB824B}"/>
+                <a16:creationId xmlns:a16="http://schemas.microsoft.com/office/drawing/2014/main" id="{97E33EA8-BF20-D3E9-555D-113266BD7607}"/>
               </a:ext>
             </a:extLst>
           </p:cNvPr>
@@ -5059,7 +5115,7 @@
           <p:cNvPr id="3" name="テキスト ボックス 2">
             <a:extLst>
               <a:ext uri="{FF2B5EF4-FFF2-40B4-BE49-F238E27FC236}">
-                <a16:creationId xmlns:a16="http://schemas.microsoft.com/office/drawing/2014/main" id="{12B7424C-4CCD-6EB5-6276-ACC39D5342E2}"/>
+                <a16:creationId xmlns:a16="http://schemas.microsoft.com/office/drawing/2014/main" id="{83D3DBCB-30BF-D2A7-69B6-7B019A091B24}"/>
               </a:ext>
             </a:extLst>
           </p:cNvPr>
@@ -5083,20 +5139,14 @@
           <a:lstStyle/>
           <a:p>
             <a:r>
-              <a:rPr kumimoji="1" lang="en-US" altLang="ja-JP" sz="3400" b="1">
+              <a:rPr kumimoji="1" lang="ja-JP" altLang="en-US" sz="3400" b="1">
                 <a:solidFill>
                   <a:srgbClr val="111111"/>
                 </a:solidFill>
                 <a:latin typeface="Arial" panose="020B0604020202020204" pitchFamily="34" charset="0"/>
               </a:rPr>
-              <a:t>ITERATIVE IMPROVEMENT</a:t>
-            </a:r>
-            <a:endParaRPr kumimoji="1" lang="ja-JP" altLang="en-US" sz="3400" b="1">
-              <a:solidFill>
-                <a:srgbClr val="111111"/>
-              </a:solidFill>
-              <a:latin typeface="Arial" panose="020B0604020202020204" pitchFamily="34" charset="0"/>
-            </a:endParaRPr>
+              <a:t>コミットから分かる改善</a:t>
+            </a:r>
           </a:p>
         </p:txBody>
       </p:sp>
@@ -5105,7 +5155,7 @@
           <p:cNvPr id="4" name="テキスト ボックス 3">
             <a:extLst>
               <a:ext uri="{FF2B5EF4-FFF2-40B4-BE49-F238E27FC236}">
-                <a16:creationId xmlns:a16="http://schemas.microsoft.com/office/drawing/2014/main" id="{52C51717-D098-F916-ADD8-F878C57F53C3}"/>
+                <a16:creationId xmlns:a16="http://schemas.microsoft.com/office/drawing/2014/main" id="{F92D5784-1562-11C1-F03E-56B7F63C5981}"/>
               </a:ext>
             </a:extLst>
           </p:cNvPr>
@@ -5135,7 +5185,7 @@
                 </a:solidFill>
                 <a:latin typeface="Arial" panose="020B0604020202020204" pitchFamily="34" charset="0"/>
               </a:rPr>
-              <a:t>Small commits continuously improve features, quality and release readiness.</a:t>
+              <a:t>Upgrade GTFS workflow to Node 24 actions</a:t>
             </a:r>
             <a:endParaRPr kumimoji="1" lang="ja-JP" altLang="en-US" sz="2000">
               <a:solidFill>
@@ -5151,7 +5201,7 @@
           <p:cNvPr id="5" name="テキスト ボックス 4">
             <a:extLst>
               <a:ext uri="{FF2B5EF4-FFF2-40B4-BE49-F238E27FC236}">
-                <a16:creationId xmlns:a16="http://schemas.microsoft.com/office/drawing/2014/main" id="{C3D426BB-2803-C33B-9225-AAFBB0EFB2BA}"/>
+                <a16:creationId xmlns:a16="http://schemas.microsoft.com/office/drawing/2014/main" id="{5D58B2A6-35E1-0F18-834D-8572B0721FAC}"/>
               </a:ext>
             </a:extLst>
           </p:cNvPr>
@@ -5198,7 +5248,7 @@
             <a:hlinkClick r:id="" action="ppaction://media"/>
             <a:extLst>
               <a:ext uri="{FF2B5EF4-FFF2-40B4-BE49-F238E27FC236}">
-                <a16:creationId xmlns:a16="http://schemas.microsoft.com/office/drawing/2014/main" id="{5B43219E-2EF9-FDC7-8830-0B68C26A44EA}"/>
+                <a16:creationId xmlns:a16="http://schemas.microsoft.com/office/drawing/2014/main" id="{4D37F87F-87DD-5899-A9A8-F746AAA36437}"/>
               </a:ext>
             </a:extLst>
           </p:cNvPr>
@@ -5233,7 +5283,7 @@
     </p:spTree>
     <p:extLst>
       <p:ext uri="{BB962C8B-B14F-4D97-AF65-F5344CB8AC3E}">
-        <p14:creationId xmlns:p14="http://schemas.microsoft.com/office/powerpoint/2010/main" val="4047728798"/>
+        <p14:creationId xmlns:p14="http://schemas.microsoft.com/office/powerpoint/2010/main" val="3174207526"/>
       </p:ext>
     </p:extLst>
   </p:cSld>
@@ -5357,7 +5407,7 @@
           <p:cNvPr id="2" name="テキスト ボックス 1">
             <a:extLst>
               <a:ext uri="{FF2B5EF4-FFF2-40B4-BE49-F238E27FC236}">
-                <a16:creationId xmlns:a16="http://schemas.microsoft.com/office/drawing/2014/main" id="{322C4CA0-3AC7-4B13-B016-F6C8FDDAC2D9}"/>
+                <a16:creationId xmlns:a16="http://schemas.microsoft.com/office/drawing/2014/main" id="{52650626-1BDF-ED72-A303-A2B14B64088F}"/>
               </a:ext>
             </a:extLst>
           </p:cNvPr>
@@ -5403,7 +5453,7 @@
           <p:cNvPr id="3" name="テキスト ボックス 2">
             <a:extLst>
               <a:ext uri="{FF2B5EF4-FFF2-40B4-BE49-F238E27FC236}">
-                <a16:creationId xmlns:a16="http://schemas.microsoft.com/office/drawing/2014/main" id="{C93D3B49-BFCC-E38B-1B3C-248B818EEC99}"/>
+                <a16:creationId xmlns:a16="http://schemas.microsoft.com/office/drawing/2014/main" id="{DE25EBCE-723C-83FA-8689-EF291E11FF92}"/>
               </a:ext>
             </a:extLst>
           </p:cNvPr>
@@ -5427,20 +5477,14 @@
           <a:lstStyle/>
           <a:p>
             <a:r>
-              <a:rPr kumimoji="1" lang="en-US" altLang="ja-JP" sz="3400" b="1">
+              <a:rPr kumimoji="1" lang="ja-JP" altLang="en-US" sz="3400" b="1">
                 <a:solidFill>
                   <a:srgbClr val="111111"/>
                 </a:solidFill>
                 <a:latin typeface="Arial" panose="020B0604020202020204" pitchFamily="34" charset="0"/>
               </a:rPr>
-              <a:t>READ THE FULL ARTICLE</a:t>
-            </a:r>
-            <a:endParaRPr kumimoji="1" lang="ja-JP" altLang="en-US" sz="3400" b="1">
-              <a:solidFill>
-                <a:srgbClr val="111111"/>
-              </a:solidFill>
-              <a:latin typeface="Arial" panose="020B0604020202020204" pitchFamily="34" charset="0"/>
-            </a:endParaRPr>
+              <a:t>詳しくは積み上げログへ</a:t>
+            </a:r>
           </a:p>
         </p:txBody>
       </p:sp>
@@ -5449,7 +5493,7 @@
           <p:cNvPr id="4" name="テキスト ボックス 3">
             <a:extLst>
               <a:ext uri="{FF2B5EF4-FFF2-40B4-BE49-F238E27FC236}">
-                <a16:creationId xmlns:a16="http://schemas.microsoft.com/office/drawing/2014/main" id="{251F4C0D-9A32-E120-1633-FB93AEA5A59E}"/>
+                <a16:creationId xmlns:a16="http://schemas.microsoft.com/office/drawing/2014/main" id="{B8B46176-1AAB-498B-2F7C-E5A50D00CBFF}"/>
               </a:ext>
             </a:extLst>
           </p:cNvPr>
@@ -5473,14 +5517,32 @@
           <a:lstStyle/>
           <a:p>
             <a:r>
-              <a:rPr kumimoji="1" lang="sv-SE" altLang="ja-JP" sz="2000">
+              <a:rPr kumimoji="1" lang="zh-TW" altLang="en-US" sz="2000">
+                <a:solidFill>
+                  <a:srgbClr val="333333"/>
+                </a:solidFill>
+                <a:latin typeface="Arial" panose="020B0604020202020204" pitchFamily="34" charset="0"/>
+              </a:rPr>
+              <a:t>記事： </a:t>
+            </a:r>
+            <a:r>
+              <a:rPr kumimoji="1" lang="en-US" altLang="zh-TW" sz="2000">
                 <a:solidFill>
                   <a:srgbClr val="333333"/>
                 </a:solidFill>
                 <a:latin typeface="Arial" panose="020B0604020202020204" pitchFamily="34" charset="0"/>
               </a:rPr>
               <a:t>https://syunnjack.dev/articles/kousokubus-benri
-TSUMIAGE LOG</a:t>
+</a:t>
+            </a:r>
+            <a:r>
+              <a:rPr kumimoji="1" lang="zh-TW" altLang="en-US" sz="2000">
+                <a:solidFill>
+                  <a:srgbClr val="333333"/>
+                </a:solidFill>
+                <a:latin typeface="Arial" panose="020B0604020202020204" pitchFamily="34" charset="0"/>
+              </a:rPr>
+              <a:t>学び、作り、振り返る開発記録。</a:t>
             </a:r>
             <a:endParaRPr kumimoji="1" lang="ja-JP" altLang="en-US" sz="2000">
               <a:solidFill>
@@ -5496,7 +5558,7 @@
           <p:cNvPr id="5" name="テキスト ボックス 4">
             <a:extLst>
               <a:ext uri="{FF2B5EF4-FFF2-40B4-BE49-F238E27FC236}">
-                <a16:creationId xmlns:a16="http://schemas.microsoft.com/office/drawing/2014/main" id="{64652809-E2A8-5ED3-EAB4-FEB9335FAC5E}"/>
+                <a16:creationId xmlns:a16="http://schemas.microsoft.com/office/drawing/2014/main" id="{BDBBDF5A-6419-9457-A362-0935185E8D5F}"/>
               </a:ext>
             </a:extLst>
           </p:cNvPr>
@@ -5543,7 +5605,7 @@
             <a:hlinkClick r:id="" action="ppaction://media"/>
             <a:extLst>
               <a:ext uri="{FF2B5EF4-FFF2-40B4-BE49-F238E27FC236}">
-                <a16:creationId xmlns:a16="http://schemas.microsoft.com/office/drawing/2014/main" id="{5FEA70EA-FB4F-17A9-0DCB-39739F58C87E}"/>
+                <a16:creationId xmlns:a16="http://schemas.microsoft.com/office/drawing/2014/main" id="{FF8D2ED7-D107-1B36-A763-A8C25F09119D}"/>
               </a:ext>
             </a:extLst>
           </p:cNvPr>
@@ -5578,7 +5640,7 @@
     </p:spTree>
     <p:extLst>
       <p:ext uri="{BB962C8B-B14F-4D97-AF65-F5344CB8AC3E}">
-        <p14:creationId xmlns:p14="http://schemas.microsoft.com/office/powerpoint/2010/main" val="4064339728"/>
+        <p14:creationId xmlns:p14="http://schemas.microsoft.com/office/powerpoint/2010/main" val="3689118619"/>
       </p:ext>
     </p:extLst>
   </p:cSld>

--- a/public/videos/repositories/kousokubus-benri/kousokubus-benri-tech-preview.pptx
+++ b/public/videos/repositories/kousokubus-benri/kousokubus-benri-tech-preview.pptx
@@ -134,7 +134,7 @@
           <p:cNvPr id="2" name="タイトル 1">
             <a:extLst>
               <a:ext uri="{FF2B5EF4-FFF2-40B4-BE49-F238E27FC236}">
-                <a16:creationId xmlns:a16="http://schemas.microsoft.com/office/drawing/2014/main" id="{AEB49F79-519E-8330-B371-096B75FE7DA7}"/>
+                <a16:creationId xmlns:a16="http://schemas.microsoft.com/office/drawing/2014/main" id="{7E667A52-5517-ED41-9F42-A13946C1B5E9}"/>
               </a:ext>
             </a:extLst>
           </p:cNvPr>
@@ -171,7 +171,7 @@
           <p:cNvPr id="3" name="字幕 2">
             <a:extLst>
               <a:ext uri="{FF2B5EF4-FFF2-40B4-BE49-F238E27FC236}">
-                <a16:creationId xmlns:a16="http://schemas.microsoft.com/office/drawing/2014/main" id="{D9CAF168-9F1C-81EE-B66E-EC2EF1CF46E8}"/>
+                <a16:creationId xmlns:a16="http://schemas.microsoft.com/office/drawing/2014/main" id="{D48D9631-23F7-BEFD-26FC-72216996BA2F}"/>
               </a:ext>
             </a:extLst>
           </p:cNvPr>
@@ -241,7 +241,7 @@
           <p:cNvPr id="4" name="日付プレースホルダー 3">
             <a:extLst>
               <a:ext uri="{FF2B5EF4-FFF2-40B4-BE49-F238E27FC236}">
-                <a16:creationId xmlns:a16="http://schemas.microsoft.com/office/drawing/2014/main" id="{489BF889-24E3-436D-D0B8-CAA031D56667}"/>
+                <a16:creationId xmlns:a16="http://schemas.microsoft.com/office/drawing/2014/main" id="{DD65026D-3AA2-EB6C-1773-6ABC7979D80A}"/>
               </a:ext>
             </a:extLst>
           </p:cNvPr>
@@ -257,7 +257,7 @@
           <a:bodyPr/>
           <a:lstStyle/>
           <a:p>
-            <a:fld id="{9962EF84-B6DF-449E-AFEB-FAC94E7545E8}" type="datetimeFigureOut">
+            <a:fld id="{BC2F9271-2879-4650-B868-CBCA2F53BE84}" type="datetimeFigureOut">
               <a:rPr kumimoji="1" lang="ja-JP" altLang="en-US" smtClean="0"/>
               <a:t>2026/7/30</a:t>
             </a:fld>
@@ -270,7 +270,7 @@
           <p:cNvPr id="5" name="フッター プレースホルダー 4">
             <a:extLst>
               <a:ext uri="{FF2B5EF4-FFF2-40B4-BE49-F238E27FC236}">
-                <a16:creationId xmlns:a16="http://schemas.microsoft.com/office/drawing/2014/main" id="{60DD10FE-8779-2150-0E20-063ED2842640}"/>
+                <a16:creationId xmlns:a16="http://schemas.microsoft.com/office/drawing/2014/main" id="{74C28CD1-BBA5-0CD4-F868-755652952118}"/>
               </a:ext>
             </a:extLst>
           </p:cNvPr>
@@ -295,7 +295,7 @@
           <p:cNvPr id="6" name="スライド番号プレースホルダー 5">
             <a:extLst>
               <a:ext uri="{FF2B5EF4-FFF2-40B4-BE49-F238E27FC236}">
-                <a16:creationId xmlns:a16="http://schemas.microsoft.com/office/drawing/2014/main" id="{600A2B5F-61D3-5ED5-1137-DA799C2598E5}"/>
+                <a16:creationId xmlns:a16="http://schemas.microsoft.com/office/drawing/2014/main" id="{F057DCDA-AAB9-B5E8-761A-6CA759723038}"/>
               </a:ext>
             </a:extLst>
           </p:cNvPr>
@@ -311,7 +311,7 @@
           <a:bodyPr/>
           <a:lstStyle/>
           <a:p>
-            <a:fld id="{4D2E4571-73FA-49EC-BDBA-3E4220AFBD3D}" type="slidenum">
+            <a:fld id="{F01F8350-FBB8-444A-8AAA-EF9D8FF0E1EB}" type="slidenum">
               <a:rPr kumimoji="1" lang="ja-JP" altLang="en-US" smtClean="0"/>
               <a:t>‹#›</a:t>
             </a:fld>
@@ -322,7 +322,7 @@
     </p:spTree>
     <p:extLst>
       <p:ext uri="{BB962C8B-B14F-4D97-AF65-F5344CB8AC3E}">
-        <p14:creationId xmlns:p14="http://schemas.microsoft.com/office/powerpoint/2010/main" val="866417731"/>
+        <p14:creationId xmlns:p14="http://schemas.microsoft.com/office/powerpoint/2010/main" val="3814119467"/>
       </p:ext>
     </p:extLst>
   </p:cSld>
@@ -354,7 +354,7 @@
           <p:cNvPr id="2" name="タイトル 1">
             <a:extLst>
               <a:ext uri="{FF2B5EF4-FFF2-40B4-BE49-F238E27FC236}">
-                <a16:creationId xmlns:a16="http://schemas.microsoft.com/office/drawing/2014/main" id="{5E80C898-C219-4416-40AA-128CB182B611}"/>
+                <a16:creationId xmlns:a16="http://schemas.microsoft.com/office/drawing/2014/main" id="{3CBF7313-F55A-77A2-BE6F-C829119737E0}"/>
               </a:ext>
             </a:extLst>
           </p:cNvPr>
@@ -382,7 +382,7 @@
           <p:cNvPr id="3" name="縦書きテキスト プレースホルダー 2">
             <a:extLst>
               <a:ext uri="{FF2B5EF4-FFF2-40B4-BE49-F238E27FC236}">
-                <a16:creationId xmlns:a16="http://schemas.microsoft.com/office/drawing/2014/main" id="{1C82D03D-6D1B-718D-7830-4F221F4ACAF7}"/>
+                <a16:creationId xmlns:a16="http://schemas.microsoft.com/office/drawing/2014/main" id="{5AEC1570-ADD8-C732-C1F7-457BAE34AEEF}"/>
               </a:ext>
             </a:extLst>
           </p:cNvPr>
@@ -471,7 +471,7 @@
           <p:cNvPr id="4" name="日付プレースホルダー 3">
             <a:extLst>
               <a:ext uri="{FF2B5EF4-FFF2-40B4-BE49-F238E27FC236}">
-                <a16:creationId xmlns:a16="http://schemas.microsoft.com/office/drawing/2014/main" id="{5BF21AEA-29F0-60D0-B908-AC59F40E81DC}"/>
+                <a16:creationId xmlns:a16="http://schemas.microsoft.com/office/drawing/2014/main" id="{E923C7F2-EA58-B1DE-1F7A-CCD76CF729B9}"/>
               </a:ext>
             </a:extLst>
           </p:cNvPr>
@@ -487,7 +487,7 @@
           <a:bodyPr/>
           <a:lstStyle/>
           <a:p>
-            <a:fld id="{9962EF84-B6DF-449E-AFEB-FAC94E7545E8}" type="datetimeFigureOut">
+            <a:fld id="{BC2F9271-2879-4650-B868-CBCA2F53BE84}" type="datetimeFigureOut">
               <a:rPr kumimoji="1" lang="ja-JP" altLang="en-US" smtClean="0"/>
               <a:t>2026/7/30</a:t>
             </a:fld>
@@ -500,7 +500,7 @@
           <p:cNvPr id="5" name="フッター プレースホルダー 4">
             <a:extLst>
               <a:ext uri="{FF2B5EF4-FFF2-40B4-BE49-F238E27FC236}">
-                <a16:creationId xmlns:a16="http://schemas.microsoft.com/office/drawing/2014/main" id="{7DCC5386-F968-150C-ECF2-6BA21CDA1940}"/>
+                <a16:creationId xmlns:a16="http://schemas.microsoft.com/office/drawing/2014/main" id="{F009C801-F12F-DA22-2833-1917D0309E26}"/>
               </a:ext>
             </a:extLst>
           </p:cNvPr>
@@ -525,7 +525,7 @@
           <p:cNvPr id="6" name="スライド番号プレースホルダー 5">
             <a:extLst>
               <a:ext uri="{FF2B5EF4-FFF2-40B4-BE49-F238E27FC236}">
-                <a16:creationId xmlns:a16="http://schemas.microsoft.com/office/drawing/2014/main" id="{CB49F6E0-801B-B5AF-3A4F-787805C16E6E}"/>
+                <a16:creationId xmlns:a16="http://schemas.microsoft.com/office/drawing/2014/main" id="{AED21149-9E30-10DE-C5D1-9BDDD3DD4586}"/>
               </a:ext>
             </a:extLst>
           </p:cNvPr>
@@ -541,7 +541,7 @@
           <a:bodyPr/>
           <a:lstStyle/>
           <a:p>
-            <a:fld id="{4D2E4571-73FA-49EC-BDBA-3E4220AFBD3D}" type="slidenum">
+            <a:fld id="{F01F8350-FBB8-444A-8AAA-EF9D8FF0E1EB}" type="slidenum">
               <a:rPr kumimoji="1" lang="ja-JP" altLang="en-US" smtClean="0"/>
               <a:t>‹#›</a:t>
             </a:fld>
@@ -552,7 +552,7 @@
     </p:spTree>
     <p:extLst>
       <p:ext uri="{BB962C8B-B14F-4D97-AF65-F5344CB8AC3E}">
-        <p14:creationId xmlns:p14="http://schemas.microsoft.com/office/powerpoint/2010/main" val="594587301"/>
+        <p14:creationId xmlns:p14="http://schemas.microsoft.com/office/powerpoint/2010/main" val="3124366758"/>
       </p:ext>
     </p:extLst>
   </p:cSld>
@@ -584,7 +584,7 @@
           <p:cNvPr id="2" name="縦書きタイトル 1">
             <a:extLst>
               <a:ext uri="{FF2B5EF4-FFF2-40B4-BE49-F238E27FC236}">
-                <a16:creationId xmlns:a16="http://schemas.microsoft.com/office/drawing/2014/main" id="{632EBD9A-32AC-9625-FDCD-98C9F2B0E92E}"/>
+                <a16:creationId xmlns:a16="http://schemas.microsoft.com/office/drawing/2014/main" id="{C50D780B-CE39-8D89-AB4D-AEC2FAFF1041}"/>
               </a:ext>
             </a:extLst>
           </p:cNvPr>
@@ -617,7 +617,7 @@
           <p:cNvPr id="3" name="縦書きテキスト プレースホルダー 2">
             <a:extLst>
               <a:ext uri="{FF2B5EF4-FFF2-40B4-BE49-F238E27FC236}">
-                <a16:creationId xmlns:a16="http://schemas.microsoft.com/office/drawing/2014/main" id="{ED68BA14-3432-CCB6-C354-DA68B74D48C8}"/>
+                <a16:creationId xmlns:a16="http://schemas.microsoft.com/office/drawing/2014/main" id="{44204EC4-DA54-CB3F-B052-EFC2A7A07E5A}"/>
               </a:ext>
             </a:extLst>
           </p:cNvPr>
@@ -711,7 +711,7 @@
           <p:cNvPr id="4" name="日付プレースホルダー 3">
             <a:extLst>
               <a:ext uri="{FF2B5EF4-FFF2-40B4-BE49-F238E27FC236}">
-                <a16:creationId xmlns:a16="http://schemas.microsoft.com/office/drawing/2014/main" id="{D95F70D4-6199-ABA2-5229-C1A2FD868C35}"/>
+                <a16:creationId xmlns:a16="http://schemas.microsoft.com/office/drawing/2014/main" id="{BF6950D1-AD1D-3FA3-9205-6CDC31355D83}"/>
               </a:ext>
             </a:extLst>
           </p:cNvPr>
@@ -727,7 +727,7 @@
           <a:bodyPr/>
           <a:lstStyle/>
           <a:p>
-            <a:fld id="{9962EF84-B6DF-449E-AFEB-FAC94E7545E8}" type="datetimeFigureOut">
+            <a:fld id="{BC2F9271-2879-4650-B868-CBCA2F53BE84}" type="datetimeFigureOut">
               <a:rPr kumimoji="1" lang="ja-JP" altLang="en-US" smtClean="0"/>
               <a:t>2026/7/30</a:t>
             </a:fld>
@@ -740,7 +740,7 @@
           <p:cNvPr id="5" name="フッター プレースホルダー 4">
             <a:extLst>
               <a:ext uri="{FF2B5EF4-FFF2-40B4-BE49-F238E27FC236}">
-                <a16:creationId xmlns:a16="http://schemas.microsoft.com/office/drawing/2014/main" id="{1DE7E7FC-DBCF-E8C3-2482-627140DE3E98}"/>
+                <a16:creationId xmlns:a16="http://schemas.microsoft.com/office/drawing/2014/main" id="{1699C9FC-4FFF-75D1-136C-8A3CE80142E1}"/>
               </a:ext>
             </a:extLst>
           </p:cNvPr>
@@ -765,7 +765,7 @@
           <p:cNvPr id="6" name="スライド番号プレースホルダー 5">
             <a:extLst>
               <a:ext uri="{FF2B5EF4-FFF2-40B4-BE49-F238E27FC236}">
-                <a16:creationId xmlns:a16="http://schemas.microsoft.com/office/drawing/2014/main" id="{755E0479-4BC5-580C-2319-9357755D09E5}"/>
+                <a16:creationId xmlns:a16="http://schemas.microsoft.com/office/drawing/2014/main" id="{A577119D-CB9A-65FB-CE1F-7F53447B46AB}"/>
               </a:ext>
             </a:extLst>
           </p:cNvPr>
@@ -781,7 +781,7 @@
           <a:bodyPr/>
           <a:lstStyle/>
           <a:p>
-            <a:fld id="{4D2E4571-73FA-49EC-BDBA-3E4220AFBD3D}" type="slidenum">
+            <a:fld id="{F01F8350-FBB8-444A-8AAA-EF9D8FF0E1EB}" type="slidenum">
               <a:rPr kumimoji="1" lang="ja-JP" altLang="en-US" smtClean="0"/>
               <a:t>‹#›</a:t>
             </a:fld>
@@ -792,7 +792,7 @@
     </p:spTree>
     <p:extLst>
       <p:ext uri="{BB962C8B-B14F-4D97-AF65-F5344CB8AC3E}">
-        <p14:creationId xmlns:p14="http://schemas.microsoft.com/office/powerpoint/2010/main" val="527989483"/>
+        <p14:creationId xmlns:p14="http://schemas.microsoft.com/office/powerpoint/2010/main" val="513282133"/>
       </p:ext>
     </p:extLst>
   </p:cSld>
@@ -824,7 +824,7 @@
           <p:cNvPr id="2" name="タイトル 1">
             <a:extLst>
               <a:ext uri="{FF2B5EF4-FFF2-40B4-BE49-F238E27FC236}">
-                <a16:creationId xmlns:a16="http://schemas.microsoft.com/office/drawing/2014/main" id="{09A1154A-78EC-FA40-D79D-3540AB8E6C88}"/>
+                <a16:creationId xmlns:a16="http://schemas.microsoft.com/office/drawing/2014/main" id="{79EE31BA-CDCE-8AC0-B3D6-D6B2AE2F61CA}"/>
               </a:ext>
             </a:extLst>
           </p:cNvPr>
@@ -852,7 +852,7 @@
           <p:cNvPr id="3" name="コンテンツ プレースホルダー 2">
             <a:extLst>
               <a:ext uri="{FF2B5EF4-FFF2-40B4-BE49-F238E27FC236}">
-                <a16:creationId xmlns:a16="http://schemas.microsoft.com/office/drawing/2014/main" id="{A85899AF-42AD-0C0E-5E7A-EF4DEC2B4C92}"/>
+                <a16:creationId xmlns:a16="http://schemas.microsoft.com/office/drawing/2014/main" id="{F37CFAD2-2FCD-A989-7BD3-F8C6BD604D05}"/>
               </a:ext>
             </a:extLst>
           </p:cNvPr>
@@ -941,7 +941,7 @@
           <p:cNvPr id="4" name="日付プレースホルダー 3">
             <a:extLst>
               <a:ext uri="{FF2B5EF4-FFF2-40B4-BE49-F238E27FC236}">
-                <a16:creationId xmlns:a16="http://schemas.microsoft.com/office/drawing/2014/main" id="{371ECDA9-F4D0-F8CB-7B0B-0858F392A9E2}"/>
+                <a16:creationId xmlns:a16="http://schemas.microsoft.com/office/drawing/2014/main" id="{F91D6819-ABC8-2A86-0782-D7C55A6653C2}"/>
               </a:ext>
             </a:extLst>
           </p:cNvPr>
@@ -957,7 +957,7 @@
           <a:bodyPr/>
           <a:lstStyle/>
           <a:p>
-            <a:fld id="{9962EF84-B6DF-449E-AFEB-FAC94E7545E8}" type="datetimeFigureOut">
+            <a:fld id="{BC2F9271-2879-4650-B868-CBCA2F53BE84}" type="datetimeFigureOut">
               <a:rPr kumimoji="1" lang="ja-JP" altLang="en-US" smtClean="0"/>
               <a:t>2026/7/30</a:t>
             </a:fld>
@@ -970,7 +970,7 @@
           <p:cNvPr id="5" name="フッター プレースホルダー 4">
             <a:extLst>
               <a:ext uri="{FF2B5EF4-FFF2-40B4-BE49-F238E27FC236}">
-                <a16:creationId xmlns:a16="http://schemas.microsoft.com/office/drawing/2014/main" id="{7E5E1D5B-D5F2-01BE-266B-92A7BADE6130}"/>
+                <a16:creationId xmlns:a16="http://schemas.microsoft.com/office/drawing/2014/main" id="{0B0F445D-8E11-AB0F-CF5B-BA9388F2E813}"/>
               </a:ext>
             </a:extLst>
           </p:cNvPr>
@@ -995,7 +995,7 @@
           <p:cNvPr id="6" name="スライド番号プレースホルダー 5">
             <a:extLst>
               <a:ext uri="{FF2B5EF4-FFF2-40B4-BE49-F238E27FC236}">
-                <a16:creationId xmlns:a16="http://schemas.microsoft.com/office/drawing/2014/main" id="{4D121DB9-5ACC-B5DF-E31D-F65BCA9263A3}"/>
+                <a16:creationId xmlns:a16="http://schemas.microsoft.com/office/drawing/2014/main" id="{A87C9052-0244-302E-06E3-98BFDCFAA1AD}"/>
               </a:ext>
             </a:extLst>
           </p:cNvPr>
@@ -1011,7 +1011,7 @@
           <a:bodyPr/>
           <a:lstStyle/>
           <a:p>
-            <a:fld id="{4D2E4571-73FA-49EC-BDBA-3E4220AFBD3D}" type="slidenum">
+            <a:fld id="{F01F8350-FBB8-444A-8AAA-EF9D8FF0E1EB}" type="slidenum">
               <a:rPr kumimoji="1" lang="ja-JP" altLang="en-US" smtClean="0"/>
               <a:t>‹#›</a:t>
             </a:fld>
@@ -1022,7 +1022,7 @@
     </p:spTree>
     <p:extLst>
       <p:ext uri="{BB962C8B-B14F-4D97-AF65-F5344CB8AC3E}">
-        <p14:creationId xmlns:p14="http://schemas.microsoft.com/office/powerpoint/2010/main" val="1761743698"/>
+        <p14:creationId xmlns:p14="http://schemas.microsoft.com/office/powerpoint/2010/main" val="2848602768"/>
       </p:ext>
     </p:extLst>
   </p:cSld>
@@ -1054,7 +1054,7 @@
           <p:cNvPr id="2" name="タイトル 1">
             <a:extLst>
               <a:ext uri="{FF2B5EF4-FFF2-40B4-BE49-F238E27FC236}">
-                <a16:creationId xmlns:a16="http://schemas.microsoft.com/office/drawing/2014/main" id="{C68E9221-00D6-21F5-24E3-8FDD47738C5F}"/>
+                <a16:creationId xmlns:a16="http://schemas.microsoft.com/office/drawing/2014/main" id="{8A547ADD-8167-2BB6-818E-928D8CDCE083}"/>
               </a:ext>
             </a:extLst>
           </p:cNvPr>
@@ -1091,7 +1091,7 @@
           <p:cNvPr id="3" name="テキスト プレースホルダー 2">
             <a:extLst>
               <a:ext uri="{FF2B5EF4-FFF2-40B4-BE49-F238E27FC236}">
-                <a16:creationId xmlns:a16="http://schemas.microsoft.com/office/drawing/2014/main" id="{1059CB16-212D-C1C3-4D65-C069EA408246}"/>
+                <a16:creationId xmlns:a16="http://schemas.microsoft.com/office/drawing/2014/main" id="{E0F6B023-888B-52F7-69D3-A01FCA47FDA2}"/>
               </a:ext>
             </a:extLst>
           </p:cNvPr>
@@ -1216,7 +1216,7 @@
           <p:cNvPr id="4" name="日付プレースホルダー 3">
             <a:extLst>
               <a:ext uri="{FF2B5EF4-FFF2-40B4-BE49-F238E27FC236}">
-                <a16:creationId xmlns:a16="http://schemas.microsoft.com/office/drawing/2014/main" id="{517D9B5D-3398-F427-B328-45DFCFE0CAC9}"/>
+                <a16:creationId xmlns:a16="http://schemas.microsoft.com/office/drawing/2014/main" id="{200CF897-38D1-A412-0F10-C0AC665B046F}"/>
               </a:ext>
             </a:extLst>
           </p:cNvPr>
@@ -1232,7 +1232,7 @@
           <a:bodyPr/>
           <a:lstStyle/>
           <a:p>
-            <a:fld id="{9962EF84-B6DF-449E-AFEB-FAC94E7545E8}" type="datetimeFigureOut">
+            <a:fld id="{BC2F9271-2879-4650-B868-CBCA2F53BE84}" type="datetimeFigureOut">
               <a:rPr kumimoji="1" lang="ja-JP" altLang="en-US" smtClean="0"/>
               <a:t>2026/7/30</a:t>
             </a:fld>
@@ -1245,7 +1245,7 @@
           <p:cNvPr id="5" name="フッター プレースホルダー 4">
             <a:extLst>
               <a:ext uri="{FF2B5EF4-FFF2-40B4-BE49-F238E27FC236}">
-                <a16:creationId xmlns:a16="http://schemas.microsoft.com/office/drawing/2014/main" id="{33288F30-4E9C-08B5-8F59-FCF015B76767}"/>
+                <a16:creationId xmlns:a16="http://schemas.microsoft.com/office/drawing/2014/main" id="{831C35FA-8881-85A5-7F4C-CF5014EA24F0}"/>
               </a:ext>
             </a:extLst>
           </p:cNvPr>
@@ -1270,7 +1270,7 @@
           <p:cNvPr id="6" name="スライド番号プレースホルダー 5">
             <a:extLst>
               <a:ext uri="{FF2B5EF4-FFF2-40B4-BE49-F238E27FC236}">
-                <a16:creationId xmlns:a16="http://schemas.microsoft.com/office/drawing/2014/main" id="{7AAFB7DD-679B-0731-A16B-520E538E4C4E}"/>
+                <a16:creationId xmlns:a16="http://schemas.microsoft.com/office/drawing/2014/main" id="{9BD68E0A-33CE-4529-F744-5CCCE0CDD8BD}"/>
               </a:ext>
             </a:extLst>
           </p:cNvPr>
@@ -1286,7 +1286,7 @@
           <a:bodyPr/>
           <a:lstStyle/>
           <a:p>
-            <a:fld id="{4D2E4571-73FA-49EC-BDBA-3E4220AFBD3D}" type="slidenum">
+            <a:fld id="{F01F8350-FBB8-444A-8AAA-EF9D8FF0E1EB}" type="slidenum">
               <a:rPr kumimoji="1" lang="ja-JP" altLang="en-US" smtClean="0"/>
               <a:t>‹#›</a:t>
             </a:fld>
@@ -1297,7 +1297,7 @@
     </p:spTree>
     <p:extLst>
       <p:ext uri="{BB962C8B-B14F-4D97-AF65-F5344CB8AC3E}">
-        <p14:creationId xmlns:p14="http://schemas.microsoft.com/office/powerpoint/2010/main" val="2723710474"/>
+        <p14:creationId xmlns:p14="http://schemas.microsoft.com/office/powerpoint/2010/main" val="2488208625"/>
       </p:ext>
     </p:extLst>
   </p:cSld>
@@ -1329,7 +1329,7 @@
           <p:cNvPr id="2" name="タイトル 1">
             <a:extLst>
               <a:ext uri="{FF2B5EF4-FFF2-40B4-BE49-F238E27FC236}">
-                <a16:creationId xmlns:a16="http://schemas.microsoft.com/office/drawing/2014/main" id="{B4A5078E-15B1-A137-8BED-49E67512C18B}"/>
+                <a16:creationId xmlns:a16="http://schemas.microsoft.com/office/drawing/2014/main" id="{27F7C9FB-A09E-3929-0D63-B48AB72D8D1D}"/>
               </a:ext>
             </a:extLst>
           </p:cNvPr>
@@ -1357,7 +1357,7 @@
           <p:cNvPr id="3" name="コンテンツ プレースホルダー 2">
             <a:extLst>
               <a:ext uri="{FF2B5EF4-FFF2-40B4-BE49-F238E27FC236}">
-                <a16:creationId xmlns:a16="http://schemas.microsoft.com/office/drawing/2014/main" id="{05A2983D-8E94-EF23-8266-BF50548B8A49}"/>
+                <a16:creationId xmlns:a16="http://schemas.microsoft.com/office/drawing/2014/main" id="{2AD28C39-7DE4-9D07-A8D7-6EDFB7DE31F0}"/>
               </a:ext>
             </a:extLst>
           </p:cNvPr>
@@ -1451,7 +1451,7 @@
           <p:cNvPr id="4" name="コンテンツ プレースホルダー 3">
             <a:extLst>
               <a:ext uri="{FF2B5EF4-FFF2-40B4-BE49-F238E27FC236}">
-                <a16:creationId xmlns:a16="http://schemas.microsoft.com/office/drawing/2014/main" id="{DF388EA8-1DA4-0200-0E73-02824026B621}"/>
+                <a16:creationId xmlns:a16="http://schemas.microsoft.com/office/drawing/2014/main" id="{B03C2D30-35D4-70EE-4C43-47BBAD75AC4F}"/>
               </a:ext>
             </a:extLst>
           </p:cNvPr>
@@ -1545,7 +1545,7 @@
           <p:cNvPr id="5" name="日付プレースホルダー 4">
             <a:extLst>
               <a:ext uri="{FF2B5EF4-FFF2-40B4-BE49-F238E27FC236}">
-                <a16:creationId xmlns:a16="http://schemas.microsoft.com/office/drawing/2014/main" id="{CA26C868-4BEE-5076-7809-54A9E288B8A1}"/>
+                <a16:creationId xmlns:a16="http://schemas.microsoft.com/office/drawing/2014/main" id="{73EB7E61-8109-B0E1-CD62-EC3113740D7E}"/>
               </a:ext>
             </a:extLst>
           </p:cNvPr>
@@ -1561,7 +1561,7 @@
           <a:bodyPr/>
           <a:lstStyle/>
           <a:p>
-            <a:fld id="{9962EF84-B6DF-449E-AFEB-FAC94E7545E8}" type="datetimeFigureOut">
+            <a:fld id="{BC2F9271-2879-4650-B868-CBCA2F53BE84}" type="datetimeFigureOut">
               <a:rPr kumimoji="1" lang="ja-JP" altLang="en-US" smtClean="0"/>
               <a:t>2026/7/30</a:t>
             </a:fld>
@@ -1574,7 +1574,7 @@
           <p:cNvPr id="6" name="フッター プレースホルダー 5">
             <a:extLst>
               <a:ext uri="{FF2B5EF4-FFF2-40B4-BE49-F238E27FC236}">
-                <a16:creationId xmlns:a16="http://schemas.microsoft.com/office/drawing/2014/main" id="{52A09BB2-44E8-879D-EE64-CF176C3AFD3D}"/>
+                <a16:creationId xmlns:a16="http://schemas.microsoft.com/office/drawing/2014/main" id="{21F71918-D0B9-ECED-5553-D0D28944DC1C}"/>
               </a:ext>
             </a:extLst>
           </p:cNvPr>
@@ -1599,7 +1599,7 @@
           <p:cNvPr id="7" name="スライド番号プレースホルダー 6">
             <a:extLst>
               <a:ext uri="{FF2B5EF4-FFF2-40B4-BE49-F238E27FC236}">
-                <a16:creationId xmlns:a16="http://schemas.microsoft.com/office/drawing/2014/main" id="{D61A7C26-83FC-C164-941C-09E1596B950F}"/>
+                <a16:creationId xmlns:a16="http://schemas.microsoft.com/office/drawing/2014/main" id="{B40238D8-0397-C70F-DEB4-1226DAA776F6}"/>
               </a:ext>
             </a:extLst>
           </p:cNvPr>
@@ -1615,7 +1615,7 @@
           <a:bodyPr/>
           <a:lstStyle/>
           <a:p>
-            <a:fld id="{4D2E4571-73FA-49EC-BDBA-3E4220AFBD3D}" type="slidenum">
+            <a:fld id="{F01F8350-FBB8-444A-8AAA-EF9D8FF0E1EB}" type="slidenum">
               <a:rPr kumimoji="1" lang="ja-JP" altLang="en-US" smtClean="0"/>
               <a:t>‹#›</a:t>
             </a:fld>
@@ -1626,7 +1626,7 @@
     </p:spTree>
     <p:extLst>
       <p:ext uri="{BB962C8B-B14F-4D97-AF65-F5344CB8AC3E}">
-        <p14:creationId xmlns:p14="http://schemas.microsoft.com/office/powerpoint/2010/main" val="2090292767"/>
+        <p14:creationId xmlns:p14="http://schemas.microsoft.com/office/powerpoint/2010/main" val="308260668"/>
       </p:ext>
     </p:extLst>
   </p:cSld>
@@ -1658,7 +1658,7 @@
           <p:cNvPr id="2" name="タイトル 1">
             <a:extLst>
               <a:ext uri="{FF2B5EF4-FFF2-40B4-BE49-F238E27FC236}">
-                <a16:creationId xmlns:a16="http://schemas.microsoft.com/office/drawing/2014/main" id="{A6875C45-A2AA-0A93-6990-F23727950E17}"/>
+                <a16:creationId xmlns:a16="http://schemas.microsoft.com/office/drawing/2014/main" id="{95CEA0CC-AD46-6DE3-75C3-382C014210A6}"/>
               </a:ext>
             </a:extLst>
           </p:cNvPr>
@@ -1691,7 +1691,7 @@
           <p:cNvPr id="3" name="テキスト プレースホルダー 2">
             <a:extLst>
               <a:ext uri="{FF2B5EF4-FFF2-40B4-BE49-F238E27FC236}">
-                <a16:creationId xmlns:a16="http://schemas.microsoft.com/office/drawing/2014/main" id="{CFE87F51-4EB5-6073-DE3C-FD1D6A904787}"/>
+                <a16:creationId xmlns:a16="http://schemas.microsoft.com/office/drawing/2014/main" id="{69F238C8-0553-851F-6333-00706F817CD4}"/>
               </a:ext>
             </a:extLst>
           </p:cNvPr>
@@ -1762,7 +1762,7 @@
           <p:cNvPr id="4" name="コンテンツ プレースホルダー 3">
             <a:extLst>
               <a:ext uri="{FF2B5EF4-FFF2-40B4-BE49-F238E27FC236}">
-                <a16:creationId xmlns:a16="http://schemas.microsoft.com/office/drawing/2014/main" id="{043411DB-99A8-2278-6A59-69242B685D6C}"/>
+                <a16:creationId xmlns:a16="http://schemas.microsoft.com/office/drawing/2014/main" id="{F53BC233-0EB5-6420-34D8-14E3F8909FA5}"/>
               </a:ext>
             </a:extLst>
           </p:cNvPr>
@@ -1856,7 +1856,7 @@
           <p:cNvPr id="5" name="テキスト プレースホルダー 4">
             <a:extLst>
               <a:ext uri="{FF2B5EF4-FFF2-40B4-BE49-F238E27FC236}">
-                <a16:creationId xmlns:a16="http://schemas.microsoft.com/office/drawing/2014/main" id="{CB023ED6-3884-9547-0229-8F6BC57EFDE0}"/>
+                <a16:creationId xmlns:a16="http://schemas.microsoft.com/office/drawing/2014/main" id="{77433088-DA2F-D2E1-004A-90C787B50C50}"/>
               </a:ext>
             </a:extLst>
           </p:cNvPr>
@@ -1927,7 +1927,7 @@
           <p:cNvPr id="6" name="コンテンツ プレースホルダー 5">
             <a:extLst>
               <a:ext uri="{FF2B5EF4-FFF2-40B4-BE49-F238E27FC236}">
-                <a16:creationId xmlns:a16="http://schemas.microsoft.com/office/drawing/2014/main" id="{0737B6DC-B723-9146-0907-0780844AD2D1}"/>
+                <a16:creationId xmlns:a16="http://schemas.microsoft.com/office/drawing/2014/main" id="{70C1895D-4044-DB85-08F8-2613EC9A90B6}"/>
               </a:ext>
             </a:extLst>
           </p:cNvPr>
@@ -2021,7 +2021,7 @@
           <p:cNvPr id="7" name="日付プレースホルダー 6">
             <a:extLst>
               <a:ext uri="{FF2B5EF4-FFF2-40B4-BE49-F238E27FC236}">
-                <a16:creationId xmlns:a16="http://schemas.microsoft.com/office/drawing/2014/main" id="{CD13CF62-48DB-A0CA-6938-EC54B8BF51C2}"/>
+                <a16:creationId xmlns:a16="http://schemas.microsoft.com/office/drawing/2014/main" id="{2498DED8-5C50-8551-734E-223712A26E65}"/>
               </a:ext>
             </a:extLst>
           </p:cNvPr>
@@ -2037,7 +2037,7 @@
           <a:bodyPr/>
           <a:lstStyle/>
           <a:p>
-            <a:fld id="{9962EF84-B6DF-449E-AFEB-FAC94E7545E8}" type="datetimeFigureOut">
+            <a:fld id="{BC2F9271-2879-4650-B868-CBCA2F53BE84}" type="datetimeFigureOut">
               <a:rPr kumimoji="1" lang="ja-JP" altLang="en-US" smtClean="0"/>
               <a:t>2026/7/30</a:t>
             </a:fld>
@@ -2050,7 +2050,7 @@
           <p:cNvPr id="8" name="フッター プレースホルダー 7">
             <a:extLst>
               <a:ext uri="{FF2B5EF4-FFF2-40B4-BE49-F238E27FC236}">
-                <a16:creationId xmlns:a16="http://schemas.microsoft.com/office/drawing/2014/main" id="{9CBBCFA5-9B78-3768-C41D-E9AC7CA5A9F2}"/>
+                <a16:creationId xmlns:a16="http://schemas.microsoft.com/office/drawing/2014/main" id="{3B839DE1-26E5-5916-14D3-1F6489AE0678}"/>
               </a:ext>
             </a:extLst>
           </p:cNvPr>
@@ -2075,7 +2075,7 @@
           <p:cNvPr id="9" name="スライド番号プレースホルダー 8">
             <a:extLst>
               <a:ext uri="{FF2B5EF4-FFF2-40B4-BE49-F238E27FC236}">
-                <a16:creationId xmlns:a16="http://schemas.microsoft.com/office/drawing/2014/main" id="{DB233D64-4B75-A65A-57DE-73F1A1D09378}"/>
+                <a16:creationId xmlns:a16="http://schemas.microsoft.com/office/drawing/2014/main" id="{63D1C54D-3E4C-0949-8622-11160B258568}"/>
               </a:ext>
             </a:extLst>
           </p:cNvPr>
@@ -2091,7 +2091,7 @@
           <a:bodyPr/>
           <a:lstStyle/>
           <a:p>
-            <a:fld id="{4D2E4571-73FA-49EC-BDBA-3E4220AFBD3D}" type="slidenum">
+            <a:fld id="{F01F8350-FBB8-444A-8AAA-EF9D8FF0E1EB}" type="slidenum">
               <a:rPr kumimoji="1" lang="ja-JP" altLang="en-US" smtClean="0"/>
               <a:t>‹#›</a:t>
             </a:fld>
@@ -2102,7 +2102,7 @@
     </p:spTree>
     <p:extLst>
       <p:ext uri="{BB962C8B-B14F-4D97-AF65-F5344CB8AC3E}">
-        <p14:creationId xmlns:p14="http://schemas.microsoft.com/office/powerpoint/2010/main" val="2947040854"/>
+        <p14:creationId xmlns:p14="http://schemas.microsoft.com/office/powerpoint/2010/main" val="843568833"/>
       </p:ext>
     </p:extLst>
   </p:cSld>
@@ -2134,7 +2134,7 @@
           <p:cNvPr id="2" name="タイトル 1">
             <a:extLst>
               <a:ext uri="{FF2B5EF4-FFF2-40B4-BE49-F238E27FC236}">
-                <a16:creationId xmlns:a16="http://schemas.microsoft.com/office/drawing/2014/main" id="{E688A546-C563-637D-5619-1DB4048BE965}"/>
+                <a16:creationId xmlns:a16="http://schemas.microsoft.com/office/drawing/2014/main" id="{FF3B1AC6-F5E8-5061-473A-0ABEE3F7DD4A}"/>
               </a:ext>
             </a:extLst>
           </p:cNvPr>
@@ -2162,7 +2162,7 @@
           <p:cNvPr id="3" name="日付プレースホルダー 2">
             <a:extLst>
               <a:ext uri="{FF2B5EF4-FFF2-40B4-BE49-F238E27FC236}">
-                <a16:creationId xmlns:a16="http://schemas.microsoft.com/office/drawing/2014/main" id="{8ACD2BD9-FB76-2169-1742-F18DCB604BA8}"/>
+                <a16:creationId xmlns:a16="http://schemas.microsoft.com/office/drawing/2014/main" id="{E962DDBE-6975-E0A8-6033-84371F950AD5}"/>
               </a:ext>
             </a:extLst>
           </p:cNvPr>
@@ -2178,7 +2178,7 @@
           <a:bodyPr/>
           <a:lstStyle/>
           <a:p>
-            <a:fld id="{9962EF84-B6DF-449E-AFEB-FAC94E7545E8}" type="datetimeFigureOut">
+            <a:fld id="{BC2F9271-2879-4650-B868-CBCA2F53BE84}" type="datetimeFigureOut">
               <a:rPr kumimoji="1" lang="ja-JP" altLang="en-US" smtClean="0"/>
               <a:t>2026/7/30</a:t>
             </a:fld>
@@ -2191,7 +2191,7 @@
           <p:cNvPr id="4" name="フッター プレースホルダー 3">
             <a:extLst>
               <a:ext uri="{FF2B5EF4-FFF2-40B4-BE49-F238E27FC236}">
-                <a16:creationId xmlns:a16="http://schemas.microsoft.com/office/drawing/2014/main" id="{D04230E6-6061-B5AA-DEE6-DA0F82682045}"/>
+                <a16:creationId xmlns:a16="http://schemas.microsoft.com/office/drawing/2014/main" id="{153EF4E1-BF24-5C70-381B-870B71E1EA16}"/>
               </a:ext>
             </a:extLst>
           </p:cNvPr>
@@ -2216,7 +2216,7 @@
           <p:cNvPr id="5" name="スライド番号プレースホルダー 4">
             <a:extLst>
               <a:ext uri="{FF2B5EF4-FFF2-40B4-BE49-F238E27FC236}">
-                <a16:creationId xmlns:a16="http://schemas.microsoft.com/office/drawing/2014/main" id="{32DC8B4C-992F-ACCA-89DD-219ACDC81A0B}"/>
+                <a16:creationId xmlns:a16="http://schemas.microsoft.com/office/drawing/2014/main" id="{F6BF7F65-B8CC-D803-9A42-776A6C27D271}"/>
               </a:ext>
             </a:extLst>
           </p:cNvPr>
@@ -2232,7 +2232,7 @@
           <a:bodyPr/>
           <a:lstStyle/>
           <a:p>
-            <a:fld id="{4D2E4571-73FA-49EC-BDBA-3E4220AFBD3D}" type="slidenum">
+            <a:fld id="{F01F8350-FBB8-444A-8AAA-EF9D8FF0E1EB}" type="slidenum">
               <a:rPr kumimoji="1" lang="ja-JP" altLang="en-US" smtClean="0"/>
               <a:t>‹#›</a:t>
             </a:fld>
@@ -2243,7 +2243,7 @@
     </p:spTree>
     <p:extLst>
       <p:ext uri="{BB962C8B-B14F-4D97-AF65-F5344CB8AC3E}">
-        <p14:creationId xmlns:p14="http://schemas.microsoft.com/office/powerpoint/2010/main" val="1360878929"/>
+        <p14:creationId xmlns:p14="http://schemas.microsoft.com/office/powerpoint/2010/main" val="2111996128"/>
       </p:ext>
     </p:extLst>
   </p:cSld>
@@ -2275,7 +2275,7 @@
           <p:cNvPr id="2" name="日付プレースホルダー 1">
             <a:extLst>
               <a:ext uri="{FF2B5EF4-FFF2-40B4-BE49-F238E27FC236}">
-                <a16:creationId xmlns:a16="http://schemas.microsoft.com/office/drawing/2014/main" id="{D1B22B66-BB57-0D78-8CF7-3D0D4EF27DD6}"/>
+                <a16:creationId xmlns:a16="http://schemas.microsoft.com/office/drawing/2014/main" id="{BD51A041-DE78-D6F8-BC37-E9957CFEE25D}"/>
               </a:ext>
             </a:extLst>
           </p:cNvPr>
@@ -2291,7 +2291,7 @@
           <a:bodyPr/>
           <a:lstStyle/>
           <a:p>
-            <a:fld id="{9962EF84-B6DF-449E-AFEB-FAC94E7545E8}" type="datetimeFigureOut">
+            <a:fld id="{BC2F9271-2879-4650-B868-CBCA2F53BE84}" type="datetimeFigureOut">
               <a:rPr kumimoji="1" lang="ja-JP" altLang="en-US" smtClean="0"/>
               <a:t>2026/7/30</a:t>
             </a:fld>
@@ -2304,7 +2304,7 @@
           <p:cNvPr id="3" name="フッター プレースホルダー 2">
             <a:extLst>
               <a:ext uri="{FF2B5EF4-FFF2-40B4-BE49-F238E27FC236}">
-                <a16:creationId xmlns:a16="http://schemas.microsoft.com/office/drawing/2014/main" id="{7259B754-2357-E453-E64A-A645D4CA1B50}"/>
+                <a16:creationId xmlns:a16="http://schemas.microsoft.com/office/drawing/2014/main" id="{9B965B80-FA73-55E9-3D63-BBEC13D5AFF5}"/>
               </a:ext>
             </a:extLst>
           </p:cNvPr>
@@ -2329,7 +2329,7 @@
           <p:cNvPr id="4" name="スライド番号プレースホルダー 3">
             <a:extLst>
               <a:ext uri="{FF2B5EF4-FFF2-40B4-BE49-F238E27FC236}">
-                <a16:creationId xmlns:a16="http://schemas.microsoft.com/office/drawing/2014/main" id="{CA23CF82-5483-E665-9B45-0ECB1BFCA30D}"/>
+                <a16:creationId xmlns:a16="http://schemas.microsoft.com/office/drawing/2014/main" id="{7642EA54-03DD-B36B-8A98-8DFA52A2C676}"/>
               </a:ext>
             </a:extLst>
           </p:cNvPr>
@@ -2345,7 +2345,7 @@
           <a:bodyPr/>
           <a:lstStyle/>
           <a:p>
-            <a:fld id="{4D2E4571-73FA-49EC-BDBA-3E4220AFBD3D}" type="slidenum">
+            <a:fld id="{F01F8350-FBB8-444A-8AAA-EF9D8FF0E1EB}" type="slidenum">
               <a:rPr kumimoji="1" lang="ja-JP" altLang="en-US" smtClean="0"/>
               <a:t>‹#›</a:t>
             </a:fld>
@@ -2356,7 +2356,7 @@
     </p:spTree>
     <p:extLst>
       <p:ext uri="{BB962C8B-B14F-4D97-AF65-F5344CB8AC3E}">
-        <p14:creationId xmlns:p14="http://schemas.microsoft.com/office/powerpoint/2010/main" val="2107841947"/>
+        <p14:creationId xmlns:p14="http://schemas.microsoft.com/office/powerpoint/2010/main" val="94653591"/>
       </p:ext>
     </p:extLst>
   </p:cSld>
@@ -2388,7 +2388,7 @@
           <p:cNvPr id="2" name="タイトル 1">
             <a:extLst>
               <a:ext uri="{FF2B5EF4-FFF2-40B4-BE49-F238E27FC236}">
-                <a16:creationId xmlns:a16="http://schemas.microsoft.com/office/drawing/2014/main" id="{0811A83C-F733-5981-0094-6660BDBFDBD4}"/>
+                <a16:creationId xmlns:a16="http://schemas.microsoft.com/office/drawing/2014/main" id="{EF183C8C-A22D-37BD-1873-E099162957F0}"/>
               </a:ext>
             </a:extLst>
           </p:cNvPr>
@@ -2425,7 +2425,7 @@
           <p:cNvPr id="3" name="コンテンツ プレースホルダー 2">
             <a:extLst>
               <a:ext uri="{FF2B5EF4-FFF2-40B4-BE49-F238E27FC236}">
-                <a16:creationId xmlns:a16="http://schemas.microsoft.com/office/drawing/2014/main" id="{83C142FE-0D61-B466-2019-40E4BACFE481}"/>
+                <a16:creationId xmlns:a16="http://schemas.microsoft.com/office/drawing/2014/main" id="{5F253D2E-7084-F645-022B-AF1795994374}"/>
               </a:ext>
             </a:extLst>
           </p:cNvPr>
@@ -2547,7 +2547,7 @@
           <p:cNvPr id="4" name="テキスト プレースホルダー 3">
             <a:extLst>
               <a:ext uri="{FF2B5EF4-FFF2-40B4-BE49-F238E27FC236}">
-                <a16:creationId xmlns:a16="http://schemas.microsoft.com/office/drawing/2014/main" id="{DA7F1274-4B21-901C-0B9D-9311479EA936}"/>
+                <a16:creationId xmlns:a16="http://schemas.microsoft.com/office/drawing/2014/main" id="{9126F052-F47A-6128-3AAB-1113436EAB99}"/>
               </a:ext>
             </a:extLst>
           </p:cNvPr>
@@ -2618,7 +2618,7 @@
           <p:cNvPr id="5" name="日付プレースホルダー 4">
             <a:extLst>
               <a:ext uri="{FF2B5EF4-FFF2-40B4-BE49-F238E27FC236}">
-                <a16:creationId xmlns:a16="http://schemas.microsoft.com/office/drawing/2014/main" id="{11DD4C96-4ADF-7524-4288-A964F310B556}"/>
+                <a16:creationId xmlns:a16="http://schemas.microsoft.com/office/drawing/2014/main" id="{856E7888-44B4-29DF-7145-8D4C7B928CA7}"/>
               </a:ext>
             </a:extLst>
           </p:cNvPr>
@@ -2634,7 +2634,7 @@
           <a:bodyPr/>
           <a:lstStyle/>
           <a:p>
-            <a:fld id="{9962EF84-B6DF-449E-AFEB-FAC94E7545E8}" type="datetimeFigureOut">
+            <a:fld id="{BC2F9271-2879-4650-B868-CBCA2F53BE84}" type="datetimeFigureOut">
               <a:rPr kumimoji="1" lang="ja-JP" altLang="en-US" smtClean="0"/>
               <a:t>2026/7/30</a:t>
             </a:fld>
@@ -2647,7 +2647,7 @@
           <p:cNvPr id="6" name="フッター プレースホルダー 5">
             <a:extLst>
               <a:ext uri="{FF2B5EF4-FFF2-40B4-BE49-F238E27FC236}">
-                <a16:creationId xmlns:a16="http://schemas.microsoft.com/office/drawing/2014/main" id="{36F4BDE7-E8BE-8A26-BA5E-0B3083556320}"/>
+                <a16:creationId xmlns:a16="http://schemas.microsoft.com/office/drawing/2014/main" id="{FD9527B5-1759-CCB0-48A8-DAA50CAC80E0}"/>
               </a:ext>
             </a:extLst>
           </p:cNvPr>
@@ -2672,7 +2672,7 @@
           <p:cNvPr id="7" name="スライド番号プレースホルダー 6">
             <a:extLst>
               <a:ext uri="{FF2B5EF4-FFF2-40B4-BE49-F238E27FC236}">
-                <a16:creationId xmlns:a16="http://schemas.microsoft.com/office/drawing/2014/main" id="{CF8D5ACD-40E4-3508-9676-CA41D3BCAE91}"/>
+                <a16:creationId xmlns:a16="http://schemas.microsoft.com/office/drawing/2014/main" id="{B0B5C2ED-8733-274F-A555-85705264B3AE}"/>
               </a:ext>
             </a:extLst>
           </p:cNvPr>
@@ -2688,7 +2688,7 @@
           <a:bodyPr/>
           <a:lstStyle/>
           <a:p>
-            <a:fld id="{4D2E4571-73FA-49EC-BDBA-3E4220AFBD3D}" type="slidenum">
+            <a:fld id="{F01F8350-FBB8-444A-8AAA-EF9D8FF0E1EB}" type="slidenum">
               <a:rPr kumimoji="1" lang="ja-JP" altLang="en-US" smtClean="0"/>
               <a:t>‹#›</a:t>
             </a:fld>
@@ -2699,7 +2699,7 @@
     </p:spTree>
     <p:extLst>
       <p:ext uri="{BB962C8B-B14F-4D97-AF65-F5344CB8AC3E}">
-        <p14:creationId xmlns:p14="http://schemas.microsoft.com/office/powerpoint/2010/main" val="600245448"/>
+        <p14:creationId xmlns:p14="http://schemas.microsoft.com/office/powerpoint/2010/main" val="3861988126"/>
       </p:ext>
     </p:extLst>
   </p:cSld>
@@ -2731,7 +2731,7 @@
           <p:cNvPr id="2" name="タイトル 1">
             <a:extLst>
               <a:ext uri="{FF2B5EF4-FFF2-40B4-BE49-F238E27FC236}">
-                <a16:creationId xmlns:a16="http://schemas.microsoft.com/office/drawing/2014/main" id="{D9BEB209-E733-638C-C1B8-A5E8F8C65E64}"/>
+                <a16:creationId xmlns:a16="http://schemas.microsoft.com/office/drawing/2014/main" id="{1376C8DA-ED19-3B60-7F84-94D9A2804C8A}"/>
               </a:ext>
             </a:extLst>
           </p:cNvPr>
@@ -2768,7 +2768,7 @@
           <p:cNvPr id="3" name="図プレースホルダー 2">
             <a:extLst>
               <a:ext uri="{FF2B5EF4-FFF2-40B4-BE49-F238E27FC236}">
-                <a16:creationId xmlns:a16="http://schemas.microsoft.com/office/drawing/2014/main" id="{C8090FD3-55EF-56F9-FDE0-5CDBCA3D3E11}"/>
+                <a16:creationId xmlns:a16="http://schemas.microsoft.com/office/drawing/2014/main" id="{E3E4E19D-016F-59F9-C93E-65882371B432}"/>
               </a:ext>
             </a:extLst>
           </p:cNvPr>
@@ -2835,7 +2835,7 @@
           <p:cNvPr id="4" name="テキスト プレースホルダー 3">
             <a:extLst>
               <a:ext uri="{FF2B5EF4-FFF2-40B4-BE49-F238E27FC236}">
-                <a16:creationId xmlns:a16="http://schemas.microsoft.com/office/drawing/2014/main" id="{93260495-731C-52A4-96C1-F5E4992259C9}"/>
+                <a16:creationId xmlns:a16="http://schemas.microsoft.com/office/drawing/2014/main" id="{B2703201-6658-7FCD-CE6B-4CF066E9FCCC}"/>
               </a:ext>
             </a:extLst>
           </p:cNvPr>
@@ -2906,7 +2906,7 @@
           <p:cNvPr id="5" name="日付プレースホルダー 4">
             <a:extLst>
               <a:ext uri="{FF2B5EF4-FFF2-40B4-BE49-F238E27FC236}">
-                <a16:creationId xmlns:a16="http://schemas.microsoft.com/office/drawing/2014/main" id="{25257DA5-E91C-1DC2-8813-0494605D4D5E}"/>
+                <a16:creationId xmlns:a16="http://schemas.microsoft.com/office/drawing/2014/main" id="{A604F62C-F755-4FE9-5F92-F47108A80DE1}"/>
               </a:ext>
             </a:extLst>
           </p:cNvPr>
@@ -2922,7 +2922,7 @@
           <a:bodyPr/>
           <a:lstStyle/>
           <a:p>
-            <a:fld id="{9962EF84-B6DF-449E-AFEB-FAC94E7545E8}" type="datetimeFigureOut">
+            <a:fld id="{BC2F9271-2879-4650-B868-CBCA2F53BE84}" type="datetimeFigureOut">
               <a:rPr kumimoji="1" lang="ja-JP" altLang="en-US" smtClean="0"/>
               <a:t>2026/7/30</a:t>
             </a:fld>
@@ -2935,7 +2935,7 @@
           <p:cNvPr id="6" name="フッター プレースホルダー 5">
             <a:extLst>
               <a:ext uri="{FF2B5EF4-FFF2-40B4-BE49-F238E27FC236}">
-                <a16:creationId xmlns:a16="http://schemas.microsoft.com/office/drawing/2014/main" id="{04359964-6539-AE04-01B8-E7D4FB648567}"/>
+                <a16:creationId xmlns:a16="http://schemas.microsoft.com/office/drawing/2014/main" id="{DD16D45A-C84D-CEAB-4F43-FFCEA35CEA76}"/>
               </a:ext>
             </a:extLst>
           </p:cNvPr>
@@ -2960,7 +2960,7 @@
           <p:cNvPr id="7" name="スライド番号プレースホルダー 6">
             <a:extLst>
               <a:ext uri="{FF2B5EF4-FFF2-40B4-BE49-F238E27FC236}">
-                <a16:creationId xmlns:a16="http://schemas.microsoft.com/office/drawing/2014/main" id="{E276B898-D69C-3B43-B908-F22CAC377F25}"/>
+                <a16:creationId xmlns:a16="http://schemas.microsoft.com/office/drawing/2014/main" id="{F0B5D5E5-FABD-4932-F6C7-B8376A9EA3BE}"/>
               </a:ext>
             </a:extLst>
           </p:cNvPr>
@@ -2976,7 +2976,7 @@
           <a:bodyPr/>
           <a:lstStyle/>
           <a:p>
-            <a:fld id="{4D2E4571-73FA-49EC-BDBA-3E4220AFBD3D}" type="slidenum">
+            <a:fld id="{F01F8350-FBB8-444A-8AAA-EF9D8FF0E1EB}" type="slidenum">
               <a:rPr kumimoji="1" lang="ja-JP" altLang="en-US" smtClean="0"/>
               <a:t>‹#›</a:t>
             </a:fld>
@@ -2987,7 +2987,7 @@
     </p:spTree>
     <p:extLst>
       <p:ext uri="{BB962C8B-B14F-4D97-AF65-F5344CB8AC3E}">
-        <p14:creationId xmlns:p14="http://schemas.microsoft.com/office/powerpoint/2010/main" val="27732921"/>
+        <p14:creationId xmlns:p14="http://schemas.microsoft.com/office/powerpoint/2010/main" val="3092221766"/>
       </p:ext>
     </p:extLst>
   </p:cSld>
@@ -3024,7 +3024,7 @@
           <p:cNvPr id="2" name="タイトル プレースホルダー 1">
             <a:extLst>
               <a:ext uri="{FF2B5EF4-FFF2-40B4-BE49-F238E27FC236}">
-                <a16:creationId xmlns:a16="http://schemas.microsoft.com/office/drawing/2014/main" id="{336DAA91-4021-3952-916F-C8B79BC505E7}"/>
+                <a16:creationId xmlns:a16="http://schemas.microsoft.com/office/drawing/2014/main" id="{7DC6E761-DACD-EDAC-0DC7-A325B6E80B1A}"/>
               </a:ext>
             </a:extLst>
           </p:cNvPr>
@@ -3062,7 +3062,7 @@
           <p:cNvPr id="3" name="テキスト プレースホルダー 2">
             <a:extLst>
               <a:ext uri="{FF2B5EF4-FFF2-40B4-BE49-F238E27FC236}">
-                <a16:creationId xmlns:a16="http://schemas.microsoft.com/office/drawing/2014/main" id="{ABCA4BB2-29D3-584B-8AA7-B76426936E69}"/>
+                <a16:creationId xmlns:a16="http://schemas.microsoft.com/office/drawing/2014/main" id="{0A68AA63-16F7-4462-7C0D-2FC32C4FF0B5}"/>
               </a:ext>
             </a:extLst>
           </p:cNvPr>
@@ -3161,7 +3161,7 @@
           <p:cNvPr id="4" name="日付プレースホルダー 3">
             <a:extLst>
               <a:ext uri="{FF2B5EF4-FFF2-40B4-BE49-F238E27FC236}">
-                <a16:creationId xmlns:a16="http://schemas.microsoft.com/office/drawing/2014/main" id="{6E20872F-5A44-74E8-7E4F-B476D2052A9A}"/>
+                <a16:creationId xmlns:a16="http://schemas.microsoft.com/office/drawing/2014/main" id="{785ADA75-31AE-6780-EF58-28244DCEC1B2}"/>
               </a:ext>
             </a:extLst>
           </p:cNvPr>
@@ -3195,7 +3195,7 @@
             </a:lvl1pPr>
           </a:lstStyle>
           <a:p>
-            <a:fld id="{9962EF84-B6DF-449E-AFEB-FAC94E7545E8}" type="datetimeFigureOut">
+            <a:fld id="{BC2F9271-2879-4650-B868-CBCA2F53BE84}" type="datetimeFigureOut">
               <a:rPr kumimoji="1" lang="ja-JP" altLang="en-US" smtClean="0"/>
               <a:t>2026/7/30</a:t>
             </a:fld>
@@ -3208,7 +3208,7 @@
           <p:cNvPr id="5" name="フッター プレースホルダー 4">
             <a:extLst>
               <a:ext uri="{FF2B5EF4-FFF2-40B4-BE49-F238E27FC236}">
-                <a16:creationId xmlns:a16="http://schemas.microsoft.com/office/drawing/2014/main" id="{7170390B-96DA-8367-162F-5B0D98EEA6F0}"/>
+                <a16:creationId xmlns:a16="http://schemas.microsoft.com/office/drawing/2014/main" id="{026C56F6-39FA-455D-30E9-822D1E7E6427}"/>
               </a:ext>
             </a:extLst>
           </p:cNvPr>
@@ -3251,7 +3251,7 @@
           <p:cNvPr id="6" name="スライド番号プレースホルダー 5">
             <a:extLst>
               <a:ext uri="{FF2B5EF4-FFF2-40B4-BE49-F238E27FC236}">
-                <a16:creationId xmlns:a16="http://schemas.microsoft.com/office/drawing/2014/main" id="{E5E497DD-D1BF-498C-8EDE-462982B0669F}"/>
+                <a16:creationId xmlns:a16="http://schemas.microsoft.com/office/drawing/2014/main" id="{09850809-49C5-3045-30B5-A692F7A237B5}"/>
               </a:ext>
             </a:extLst>
           </p:cNvPr>
@@ -3285,7 +3285,7 @@
             </a:lvl1pPr>
           </a:lstStyle>
           <a:p>
-            <a:fld id="{4D2E4571-73FA-49EC-BDBA-3E4220AFBD3D}" type="slidenum">
+            <a:fld id="{F01F8350-FBB8-444A-8AAA-EF9D8FF0E1EB}" type="slidenum">
               <a:rPr kumimoji="1" lang="ja-JP" altLang="en-US" smtClean="0"/>
               <a:t>‹#›</a:t>
             </a:fld>
@@ -3296,7 +3296,7 @@
     </p:spTree>
     <p:extLst>
       <p:ext uri="{BB962C8B-B14F-4D97-AF65-F5344CB8AC3E}">
-        <p14:creationId xmlns:p14="http://schemas.microsoft.com/office/powerpoint/2010/main" val="1826735766"/>
+        <p14:creationId xmlns:p14="http://schemas.microsoft.com/office/powerpoint/2010/main" val="2343054420"/>
       </p:ext>
     </p:extLst>
   </p:cSld>
@@ -3619,7 +3619,7 @@
           <p:cNvPr id="2" name="テキスト ボックス 1">
             <a:extLst>
               <a:ext uri="{FF2B5EF4-FFF2-40B4-BE49-F238E27FC236}">
-                <a16:creationId xmlns:a16="http://schemas.microsoft.com/office/drawing/2014/main" id="{2DBDCF86-DDDE-27EA-C065-4DB07AB12D44}"/>
+                <a16:creationId xmlns:a16="http://schemas.microsoft.com/office/drawing/2014/main" id="{B8EC240D-D49C-1419-C6C0-77F882253109}"/>
               </a:ext>
             </a:extLst>
           </p:cNvPr>
@@ -3665,7 +3665,7 @@
           <p:cNvPr id="3" name="テキスト ボックス 2">
             <a:extLst>
               <a:ext uri="{FF2B5EF4-FFF2-40B4-BE49-F238E27FC236}">
-                <a16:creationId xmlns:a16="http://schemas.microsoft.com/office/drawing/2014/main" id="{6A991F48-5F92-02F2-D836-33F88927C624}"/>
+                <a16:creationId xmlns:a16="http://schemas.microsoft.com/office/drawing/2014/main" id="{D602088B-F949-3AE8-FF85-4BF444BB7B3C}"/>
               </a:ext>
             </a:extLst>
           </p:cNvPr>
@@ -3714,7 +3714,7 @@
           <p:cNvPr id="4" name="テキスト ボックス 3">
             <a:extLst>
               <a:ext uri="{FF2B5EF4-FFF2-40B4-BE49-F238E27FC236}">
-                <a16:creationId xmlns:a16="http://schemas.microsoft.com/office/drawing/2014/main" id="{66147510-04AA-7020-8544-C3664D5F465C}"/>
+                <a16:creationId xmlns:a16="http://schemas.microsoft.com/office/drawing/2014/main" id="{ADCE6C11-693F-BBB2-6595-CBE2F11596EB}"/>
               </a:ext>
             </a:extLst>
           </p:cNvPr>
@@ -3754,7 +3754,7 @@
           <p:cNvPr id="5" name="テキスト ボックス 4">
             <a:extLst>
               <a:ext uri="{FF2B5EF4-FFF2-40B4-BE49-F238E27FC236}">
-                <a16:creationId xmlns:a16="http://schemas.microsoft.com/office/drawing/2014/main" id="{48F6D861-715A-EE9D-8931-90B91580B444}"/>
+                <a16:creationId xmlns:a16="http://schemas.microsoft.com/office/drawing/2014/main" id="{ADC1897D-94C3-D4CF-1583-353C512A6944}"/>
               </a:ext>
             </a:extLst>
           </p:cNvPr>
@@ -3801,7 +3801,7 @@
             <a:hlinkClick r:id="" action="ppaction://media"/>
             <a:extLst>
               <a:ext uri="{FF2B5EF4-FFF2-40B4-BE49-F238E27FC236}">
-                <a16:creationId xmlns:a16="http://schemas.microsoft.com/office/drawing/2014/main" id="{63FD4874-ECB8-A3A3-F8D4-4CD0B01A1529}"/>
+                <a16:creationId xmlns:a16="http://schemas.microsoft.com/office/drawing/2014/main" id="{46218CE7-B7F8-4804-33F9-FF0AC5A18213}"/>
               </a:ext>
             </a:extLst>
           </p:cNvPr>
@@ -3836,7 +3836,7 @@
     </p:spTree>
     <p:extLst>
       <p:ext uri="{BB962C8B-B14F-4D97-AF65-F5344CB8AC3E}">
-        <p14:creationId xmlns:p14="http://schemas.microsoft.com/office/powerpoint/2010/main" val="1748872642"/>
+        <p14:creationId xmlns:p14="http://schemas.microsoft.com/office/powerpoint/2010/main" val="1457262800"/>
       </p:ext>
     </p:extLst>
   </p:cSld>
@@ -3960,7 +3960,7 @@
           <p:cNvPr id="2" name="テキスト ボックス 1">
             <a:extLst>
               <a:ext uri="{FF2B5EF4-FFF2-40B4-BE49-F238E27FC236}">
-                <a16:creationId xmlns:a16="http://schemas.microsoft.com/office/drawing/2014/main" id="{2E42B8CB-30E0-B9F0-9923-C5B7A37DE53C}"/>
+                <a16:creationId xmlns:a16="http://schemas.microsoft.com/office/drawing/2014/main" id="{5B5BADAD-685C-4302-3025-4ABBB0789B38}"/>
               </a:ext>
             </a:extLst>
           </p:cNvPr>
@@ -4006,7 +4006,7 @@
           <p:cNvPr id="3" name="テキスト ボックス 2">
             <a:extLst>
               <a:ext uri="{FF2B5EF4-FFF2-40B4-BE49-F238E27FC236}">
-                <a16:creationId xmlns:a16="http://schemas.microsoft.com/office/drawing/2014/main" id="{79DEA002-E0CD-05E3-A490-DD7769C137BE}"/>
+                <a16:creationId xmlns:a16="http://schemas.microsoft.com/office/drawing/2014/main" id="{F86E024B-34F5-E6B1-E9E9-2CC49E72915D}"/>
               </a:ext>
             </a:extLst>
           </p:cNvPr>
@@ -4046,7 +4046,7 @@
           <p:cNvPr id="4" name="テキスト ボックス 3">
             <a:extLst>
               <a:ext uri="{FF2B5EF4-FFF2-40B4-BE49-F238E27FC236}">
-                <a16:creationId xmlns:a16="http://schemas.microsoft.com/office/drawing/2014/main" id="{2BF3B88C-5F01-74A6-7914-D4C74C4B87BA}"/>
+                <a16:creationId xmlns:a16="http://schemas.microsoft.com/office/drawing/2014/main" id="{EC5B7E41-6A0A-2578-BC92-FF2997D4145A}"/>
               </a:ext>
             </a:extLst>
           </p:cNvPr>
@@ -4076,14 +4076,17 @@
                 </a:solidFill>
                 <a:latin typeface="Arial" panose="020B0604020202020204" pitchFamily="34" charset="0"/>
               </a:rPr>
-              <a:t>vinext starter A clean full stack starter running on vinext https://github</a:t>
-            </a:r>
-            <a:endParaRPr kumimoji="1" lang="ja-JP" altLang="en-US" sz="2000">
-              <a:solidFill>
-                <a:srgbClr val="333333"/>
-              </a:solidFill>
-              <a:latin typeface="Arial" panose="020B0604020202020204" pitchFamily="34" charset="0"/>
-            </a:endParaRPr>
+              <a:t>Kousokubus Benri</a:t>
+            </a:r>
+            <a:r>
+              <a:rPr kumimoji="1" lang="ja-JP" altLang="en-US" sz="2000">
+                <a:solidFill>
+                  <a:srgbClr val="333333"/>
+                </a:solidFill>
+                <a:latin typeface="Arial" panose="020B0604020202020204" pitchFamily="34" charset="0"/>
+              </a:rPr>
+              <a:t>の目的、構成、実装を公開コードから確認できるプロジェクトです。</a:t>
+            </a:r>
           </a:p>
         </p:txBody>
       </p:sp>
@@ -4092,7 +4095,7 @@
           <p:cNvPr id="5" name="テキスト ボックス 4">
             <a:extLst>
               <a:ext uri="{FF2B5EF4-FFF2-40B4-BE49-F238E27FC236}">
-                <a16:creationId xmlns:a16="http://schemas.microsoft.com/office/drawing/2014/main" id="{BA1FDC75-A264-B046-897C-675E363AFBD4}"/>
+                <a16:creationId xmlns:a16="http://schemas.microsoft.com/office/drawing/2014/main" id="{EBAC3317-BC60-A76D-A2EF-D9B95F1FD54F}"/>
               </a:ext>
             </a:extLst>
           </p:cNvPr>
@@ -4139,7 +4142,7 @@
             <a:hlinkClick r:id="" action="ppaction://media"/>
             <a:extLst>
               <a:ext uri="{FF2B5EF4-FFF2-40B4-BE49-F238E27FC236}">
-                <a16:creationId xmlns:a16="http://schemas.microsoft.com/office/drawing/2014/main" id="{8D71915D-B93E-1E36-7BB7-083167EA34BC}"/>
+                <a16:creationId xmlns:a16="http://schemas.microsoft.com/office/drawing/2014/main" id="{9D276E62-F5EE-68D7-7156-9D8E2A0232E0}"/>
               </a:ext>
             </a:extLst>
           </p:cNvPr>
@@ -4174,7 +4177,7 @@
     </p:spTree>
     <p:extLst>
       <p:ext uri="{BB962C8B-B14F-4D97-AF65-F5344CB8AC3E}">
-        <p14:creationId xmlns:p14="http://schemas.microsoft.com/office/powerpoint/2010/main" val="919703155"/>
+        <p14:creationId xmlns:p14="http://schemas.microsoft.com/office/powerpoint/2010/main" val="1142564018"/>
       </p:ext>
     </p:extLst>
   </p:cSld>
@@ -4217,7 +4220,7 @@
                                   <p:childTnLst>
                                     <p:cmd type="call" cmd="playFrom(0.0)">
                                       <p:cBhvr>
-                                        <p:cTn id="6" dur="7955" fill="hold"/>
+                                        <p:cTn id="6" dur="7491" fill="hold"/>
                                         <p:tgtEl>
                                           <p:spTgt spid="6"/>
                                         </p:tgtEl>
@@ -4298,7 +4301,7 @@
           <p:cNvPr id="2" name="テキスト ボックス 1">
             <a:extLst>
               <a:ext uri="{FF2B5EF4-FFF2-40B4-BE49-F238E27FC236}">
-                <a16:creationId xmlns:a16="http://schemas.microsoft.com/office/drawing/2014/main" id="{F2786B3D-079A-E3FB-A6AF-D8AE35E5B8EE}"/>
+                <a16:creationId xmlns:a16="http://schemas.microsoft.com/office/drawing/2014/main" id="{1E79DC18-FADB-2ECD-96F3-35404055CB06}"/>
               </a:ext>
             </a:extLst>
           </p:cNvPr>
@@ -4344,7 +4347,7 @@
           <p:cNvPr id="3" name="テキスト ボックス 2">
             <a:extLst>
               <a:ext uri="{FF2B5EF4-FFF2-40B4-BE49-F238E27FC236}">
-                <a16:creationId xmlns:a16="http://schemas.microsoft.com/office/drawing/2014/main" id="{334BFAE5-6ECD-A9D7-7FA3-3B06095687BB}"/>
+                <a16:creationId xmlns:a16="http://schemas.microsoft.com/office/drawing/2014/main" id="{C8C57C1B-0FA5-FA71-AA10-A45243F31A21}"/>
               </a:ext>
             </a:extLst>
           </p:cNvPr>
@@ -4384,7 +4387,7 @@
           <p:cNvPr id="4" name="テキスト ボックス 3">
             <a:extLst>
               <a:ext uri="{FF2B5EF4-FFF2-40B4-BE49-F238E27FC236}">
-                <a16:creationId xmlns:a16="http://schemas.microsoft.com/office/drawing/2014/main" id="{C7D02482-B35D-A7AF-6191-8CECB6E99E86}"/>
+                <a16:creationId xmlns:a16="http://schemas.microsoft.com/office/drawing/2014/main" id="{F2EA3E61-318E-1A5D-885B-CE8D3C2F6369}"/>
               </a:ext>
             </a:extLst>
           </p:cNvPr>
@@ -4461,7 +4464,7 @@
           <p:cNvPr id="5" name="テキスト ボックス 4">
             <a:extLst>
               <a:ext uri="{FF2B5EF4-FFF2-40B4-BE49-F238E27FC236}">
-                <a16:creationId xmlns:a16="http://schemas.microsoft.com/office/drawing/2014/main" id="{C5DF25C4-DFDB-B207-1905-F57EE4132A89}"/>
+                <a16:creationId xmlns:a16="http://schemas.microsoft.com/office/drawing/2014/main" id="{43106374-03B4-FB84-D029-718A4728A653}"/>
               </a:ext>
             </a:extLst>
           </p:cNvPr>
@@ -4508,7 +4511,7 @@
             <a:hlinkClick r:id="" action="ppaction://media"/>
             <a:extLst>
               <a:ext uri="{FF2B5EF4-FFF2-40B4-BE49-F238E27FC236}">
-                <a16:creationId xmlns:a16="http://schemas.microsoft.com/office/drawing/2014/main" id="{E61F5B31-6F9F-54AE-3213-CBD1D43DA19E}"/>
+                <a16:creationId xmlns:a16="http://schemas.microsoft.com/office/drawing/2014/main" id="{423519B8-2CF2-D16D-89D5-C2EC5C0359FC}"/>
               </a:ext>
             </a:extLst>
           </p:cNvPr>
@@ -4543,7 +4546,7 @@
     </p:spTree>
     <p:extLst>
       <p:ext uri="{BB962C8B-B14F-4D97-AF65-F5344CB8AC3E}">
-        <p14:creationId xmlns:p14="http://schemas.microsoft.com/office/powerpoint/2010/main" val="2779599427"/>
+        <p14:creationId xmlns:p14="http://schemas.microsoft.com/office/powerpoint/2010/main" val="1539381389"/>
       </p:ext>
     </p:extLst>
   </p:cSld>
@@ -4667,7 +4670,7 @@
           <p:cNvPr id="2" name="テキスト ボックス 1">
             <a:extLst>
               <a:ext uri="{FF2B5EF4-FFF2-40B4-BE49-F238E27FC236}">
-                <a16:creationId xmlns:a16="http://schemas.microsoft.com/office/drawing/2014/main" id="{A5B1D73D-35C3-50F6-E48E-08578286F7AC}"/>
+                <a16:creationId xmlns:a16="http://schemas.microsoft.com/office/drawing/2014/main" id="{686F3028-2B1A-D7E4-60C9-5B921F7DF21B}"/>
               </a:ext>
             </a:extLst>
           </p:cNvPr>
@@ -4713,7 +4716,7 @@
           <p:cNvPr id="3" name="テキスト ボックス 2">
             <a:extLst>
               <a:ext uri="{FF2B5EF4-FFF2-40B4-BE49-F238E27FC236}">
-                <a16:creationId xmlns:a16="http://schemas.microsoft.com/office/drawing/2014/main" id="{04D2CDAD-027F-F784-FD37-487ED8BCB6B8}"/>
+                <a16:creationId xmlns:a16="http://schemas.microsoft.com/office/drawing/2014/main" id="{CC69C114-8BCB-F579-B1AF-91E657DEE133}"/>
               </a:ext>
             </a:extLst>
           </p:cNvPr>
@@ -4753,7 +4756,7 @@
           <p:cNvPr id="4" name="テキスト ボックス 3">
             <a:extLst>
               <a:ext uri="{FF2B5EF4-FFF2-40B4-BE49-F238E27FC236}">
-                <a16:creationId xmlns:a16="http://schemas.microsoft.com/office/drawing/2014/main" id="{8F349DFF-96CF-00DB-DC4E-B90A165A6CC3}"/>
+                <a16:creationId xmlns:a16="http://schemas.microsoft.com/office/drawing/2014/main" id="{FA4DCF64-00C4-BE9B-8855-D3AD6E998B38}"/>
               </a:ext>
             </a:extLst>
           </p:cNvPr>
@@ -4863,7 +4866,7 @@
           <p:cNvPr id="5" name="テキスト ボックス 4">
             <a:extLst>
               <a:ext uri="{FF2B5EF4-FFF2-40B4-BE49-F238E27FC236}">
-                <a16:creationId xmlns:a16="http://schemas.microsoft.com/office/drawing/2014/main" id="{1F8E9ACD-8100-617E-B8FF-4CA3477F2CA4}"/>
+                <a16:creationId xmlns:a16="http://schemas.microsoft.com/office/drawing/2014/main" id="{CF789A23-21D9-1795-D49F-40CD7A908C29}"/>
               </a:ext>
             </a:extLst>
           </p:cNvPr>
@@ -4910,7 +4913,7 @@
             <a:hlinkClick r:id="" action="ppaction://media"/>
             <a:extLst>
               <a:ext uri="{FF2B5EF4-FFF2-40B4-BE49-F238E27FC236}">
-                <a16:creationId xmlns:a16="http://schemas.microsoft.com/office/drawing/2014/main" id="{FE2E8E07-C218-C6F2-4CEB-79D0102B61F5}"/>
+                <a16:creationId xmlns:a16="http://schemas.microsoft.com/office/drawing/2014/main" id="{B20F9116-302C-B6C6-1E53-5B01E7AD14C8}"/>
               </a:ext>
             </a:extLst>
           </p:cNvPr>
@@ -4945,7 +4948,7 @@
     </p:spTree>
     <p:extLst>
       <p:ext uri="{BB962C8B-B14F-4D97-AF65-F5344CB8AC3E}">
-        <p14:creationId xmlns:p14="http://schemas.microsoft.com/office/powerpoint/2010/main" val="1788271069"/>
+        <p14:creationId xmlns:p14="http://schemas.microsoft.com/office/powerpoint/2010/main" val="3471564203"/>
       </p:ext>
     </p:extLst>
   </p:cSld>
@@ -5069,7 +5072,7 @@
           <p:cNvPr id="2" name="テキスト ボックス 1">
             <a:extLst>
               <a:ext uri="{FF2B5EF4-FFF2-40B4-BE49-F238E27FC236}">
-                <a16:creationId xmlns:a16="http://schemas.microsoft.com/office/drawing/2014/main" id="{97E33EA8-BF20-D3E9-555D-113266BD7607}"/>
+                <a16:creationId xmlns:a16="http://schemas.microsoft.com/office/drawing/2014/main" id="{045A94BB-93E0-B308-95A6-55A74F60547C}"/>
               </a:ext>
             </a:extLst>
           </p:cNvPr>
@@ -5115,7 +5118,7 @@
           <p:cNvPr id="3" name="テキスト ボックス 2">
             <a:extLst>
               <a:ext uri="{FF2B5EF4-FFF2-40B4-BE49-F238E27FC236}">
-                <a16:creationId xmlns:a16="http://schemas.microsoft.com/office/drawing/2014/main" id="{83D3DBCB-30BF-D2A7-69B6-7B019A091B24}"/>
+                <a16:creationId xmlns:a16="http://schemas.microsoft.com/office/drawing/2014/main" id="{367AAEAB-F511-6DEB-222D-66EA66B4BE76}"/>
               </a:ext>
             </a:extLst>
           </p:cNvPr>
@@ -5155,7 +5158,7 @@
           <p:cNvPr id="4" name="テキスト ボックス 3">
             <a:extLst>
               <a:ext uri="{FF2B5EF4-FFF2-40B4-BE49-F238E27FC236}">
-                <a16:creationId xmlns:a16="http://schemas.microsoft.com/office/drawing/2014/main" id="{F92D5784-1562-11C1-F03E-56B7F63C5981}"/>
+                <a16:creationId xmlns:a16="http://schemas.microsoft.com/office/drawing/2014/main" id="{56964B56-694C-3FB2-4C35-6727B6A6AA1D}"/>
               </a:ext>
             </a:extLst>
           </p:cNvPr>
@@ -5179,20 +5182,14 @@
           <a:lstStyle/>
           <a:p>
             <a:r>
-              <a:rPr kumimoji="1" lang="en-US" altLang="ja-JP" sz="2000">
+              <a:rPr kumimoji="1" lang="ja-JP" altLang="en-US" sz="2000">
                 <a:solidFill>
                   <a:srgbClr val="333333"/>
                 </a:solidFill>
                 <a:latin typeface="Arial" panose="020B0604020202020204" pitchFamily="34" charset="0"/>
               </a:rPr>
-              <a:t>Upgrade GTFS workflow to Node 24 actions</a:t>
-            </a:r>
-            <a:endParaRPr kumimoji="1" lang="ja-JP" altLang="en-US" sz="2000">
-              <a:solidFill>
-                <a:srgbClr val="333333"/>
-              </a:solidFill>
-              <a:latin typeface="Arial" panose="020B0604020202020204" pitchFamily="34" charset="0"/>
-            </a:endParaRPr>
+              <a:t>直近のコミットでは、実装の見直しと継続的な改善が行われました。</a:t>
+            </a:r>
           </a:p>
         </p:txBody>
       </p:sp>
@@ -5201,7 +5198,7 @@
           <p:cNvPr id="5" name="テキスト ボックス 4">
             <a:extLst>
               <a:ext uri="{FF2B5EF4-FFF2-40B4-BE49-F238E27FC236}">
-                <a16:creationId xmlns:a16="http://schemas.microsoft.com/office/drawing/2014/main" id="{5D58B2A6-35E1-0F18-834D-8572B0721FAC}"/>
+                <a16:creationId xmlns:a16="http://schemas.microsoft.com/office/drawing/2014/main" id="{FC2AE98E-C6AB-3524-0AB7-4E1EEBD2DB97}"/>
               </a:ext>
             </a:extLst>
           </p:cNvPr>
@@ -5248,7 +5245,7 @@
             <a:hlinkClick r:id="" action="ppaction://media"/>
             <a:extLst>
               <a:ext uri="{FF2B5EF4-FFF2-40B4-BE49-F238E27FC236}">
-                <a16:creationId xmlns:a16="http://schemas.microsoft.com/office/drawing/2014/main" id="{4D37F87F-87DD-5899-A9A8-F746AAA36437}"/>
+                <a16:creationId xmlns:a16="http://schemas.microsoft.com/office/drawing/2014/main" id="{3ADC5230-9919-B7C8-82D7-7C8F605B3CF8}"/>
               </a:ext>
             </a:extLst>
           </p:cNvPr>
@@ -5283,7 +5280,7 @@
     </p:spTree>
     <p:extLst>
       <p:ext uri="{BB962C8B-B14F-4D97-AF65-F5344CB8AC3E}">
-        <p14:creationId xmlns:p14="http://schemas.microsoft.com/office/powerpoint/2010/main" val="3174207526"/>
+        <p14:creationId xmlns:p14="http://schemas.microsoft.com/office/powerpoint/2010/main" val="1163541679"/>
       </p:ext>
     </p:extLst>
   </p:cSld>
@@ -5292,10 +5289,10 @@
   </p:clrMapOvr>
   <mc:AlternateContent xmlns:mc="http://schemas.openxmlformats.org/markup-compatibility/2006">
     <mc:Choice xmlns:p14="http://schemas.microsoft.com/office/powerpoint/2010/main" Requires="p14">
-      <p:transition spd="slow" p14:dur="2000" advTm="9000"/>
+      <p:transition spd="slow" p14:dur="2000" advTm="7000"/>
     </mc:Choice>
     <mc:Fallback>
-      <p:transition spd="slow" advTm="9000"/>
+      <p:transition spd="slow" advTm="7000"/>
     </mc:Fallback>
   </mc:AlternateContent>
   <p:timing>
@@ -5326,7 +5323,7 @@
                                   <p:childTnLst>
                                     <p:cmd type="call" cmd="playFrom(0.0)">
                                       <p:cBhvr>
-                                        <p:cTn id="6" dur="8360" fill="hold"/>
+                                        <p:cTn id="6" dur="6076" fill="hold"/>
                                         <p:tgtEl>
                                           <p:spTgt spid="6"/>
                                         </p:tgtEl>
@@ -5407,7 +5404,7 @@
           <p:cNvPr id="2" name="テキスト ボックス 1">
             <a:extLst>
               <a:ext uri="{FF2B5EF4-FFF2-40B4-BE49-F238E27FC236}">
-                <a16:creationId xmlns:a16="http://schemas.microsoft.com/office/drawing/2014/main" id="{52650626-1BDF-ED72-A303-A2B14B64088F}"/>
+                <a16:creationId xmlns:a16="http://schemas.microsoft.com/office/drawing/2014/main" id="{778F5C62-8FFE-92F6-E909-F2E9A66A0CE9}"/>
               </a:ext>
             </a:extLst>
           </p:cNvPr>
@@ -5453,7 +5450,7 @@
           <p:cNvPr id="3" name="テキスト ボックス 2">
             <a:extLst>
               <a:ext uri="{FF2B5EF4-FFF2-40B4-BE49-F238E27FC236}">
-                <a16:creationId xmlns:a16="http://schemas.microsoft.com/office/drawing/2014/main" id="{DE25EBCE-723C-83FA-8689-EF291E11FF92}"/>
+                <a16:creationId xmlns:a16="http://schemas.microsoft.com/office/drawing/2014/main" id="{711BE62B-D880-1750-7EB1-0E6EB75B0328}"/>
               </a:ext>
             </a:extLst>
           </p:cNvPr>
@@ -5493,7 +5490,7 @@
           <p:cNvPr id="4" name="テキスト ボックス 3">
             <a:extLst>
               <a:ext uri="{FF2B5EF4-FFF2-40B4-BE49-F238E27FC236}">
-                <a16:creationId xmlns:a16="http://schemas.microsoft.com/office/drawing/2014/main" id="{B8B46176-1AAB-498B-2F7C-E5A50D00CBFF}"/>
+                <a16:creationId xmlns:a16="http://schemas.microsoft.com/office/drawing/2014/main" id="{BD72D0AC-C4A9-8FC0-62A8-DCF26F428B79}"/>
               </a:ext>
             </a:extLst>
           </p:cNvPr>
@@ -5558,7 +5555,7 @@
           <p:cNvPr id="5" name="テキスト ボックス 4">
             <a:extLst>
               <a:ext uri="{FF2B5EF4-FFF2-40B4-BE49-F238E27FC236}">
-                <a16:creationId xmlns:a16="http://schemas.microsoft.com/office/drawing/2014/main" id="{BDBBDF5A-6419-9457-A362-0935185E8D5F}"/>
+                <a16:creationId xmlns:a16="http://schemas.microsoft.com/office/drawing/2014/main" id="{C96902BD-F529-D7CD-7FAA-D40DC79BD514}"/>
               </a:ext>
             </a:extLst>
           </p:cNvPr>
@@ -5605,7 +5602,7 @@
             <a:hlinkClick r:id="" action="ppaction://media"/>
             <a:extLst>
               <a:ext uri="{FF2B5EF4-FFF2-40B4-BE49-F238E27FC236}">
-                <a16:creationId xmlns:a16="http://schemas.microsoft.com/office/drawing/2014/main" id="{FF8D2ED7-D107-1B36-A763-A8C25F09119D}"/>
+                <a16:creationId xmlns:a16="http://schemas.microsoft.com/office/drawing/2014/main" id="{0B81B7AC-DE8E-263E-33A6-ECB3857D3308}"/>
               </a:ext>
             </a:extLst>
           </p:cNvPr>
@@ -5640,7 +5637,7 @@
     </p:spTree>
     <p:extLst>
       <p:ext uri="{BB962C8B-B14F-4D97-AF65-F5344CB8AC3E}">
-        <p14:creationId xmlns:p14="http://schemas.microsoft.com/office/powerpoint/2010/main" val="3689118619"/>
+        <p14:creationId xmlns:p14="http://schemas.microsoft.com/office/powerpoint/2010/main" val="1748843805"/>
       </p:ext>
     </p:extLst>
   </p:cSld>
